--- a/docs/workbuddy-guide/WorkBuddy仓库主管上手手册.pptx
+++ b/docs/workbuddy-guide/WorkBuddy仓库主管上手手册.pptx
@@ -3549,7 +3549,7 @@
         </p:nvGraphicFramePr>
         <p:xfrm>
           <a:off x="457200" y="1143000"/>
-          <a:ext cx="11277293" cy="2176145"/>
+          <a:ext cx="11277294" cy="2743200"/>
         </p:xfrm>
         <a:graphic>
           <a:graphicData uri="http://schemas.openxmlformats.org/drawingml/2006/table">
@@ -3558,18 +3558,18 @@
                 <a:tableStyleId>{5C22544A-7EE6-4342-B048-85BDC9FD1C3A}</a:tableStyleId>
               </a:tblPr>
               <a:tblGrid>
-                <a:gridCol w="644416"/>
-                <a:gridCol w="4188709"/>
-                <a:gridCol w="6444168"/>
+                <a:gridCol w="1611042"/>
+                <a:gridCol w="3807917"/>
+                <a:gridCol w="5858335"/>
               </a:tblGrid>
-              <a:tr h="435229">
-                <a:tc>
-                  <a:txBody>
-                    <a:bodyPr wrap="square"/>
-                    <a:lstStyle/>
-                    <a:p>
-                      <a:r>
-                        <a:rPr sz="1250" b="1" i="0">
+              <a:tr h="548640">
+                <a:tc>
+                  <a:txBody>
+                    <a:bodyPr wrap="square"/>
+                    <a:lstStyle/>
+                    <a:p>
+                      <a:r>
+                        <a:rPr sz="1500" b="1" i="0">
                           <a:solidFill>
                             <a:srgbClr val="FFFFFF"/>
                           </a:solidFill>
@@ -3592,7 +3592,7 @@
                     <a:lstStyle/>
                     <a:p>
                       <a:r>
-                        <a:rPr sz="1250" b="1" i="0">
+                        <a:rPr sz="1500" b="1" i="0">
                           <a:solidFill>
                             <a:srgbClr val="FFFFFF"/>
                           </a:solidFill>
@@ -3615,7 +3615,7 @@
                     <a:lstStyle/>
                     <a:p>
                       <a:r>
-                        <a:rPr sz="1250" b="1" i="0">
+                        <a:rPr sz="1500" b="1" i="0">
                           <a:solidFill>
                             <a:srgbClr val="FFFFFF"/>
                           </a:solidFill>
@@ -3633,14 +3633,14 @@
                   </a:tcPr>
                 </a:tc>
               </a:tr>
-              <a:tr h="435229">
-                <a:tc>
-                  <a:txBody>
-                    <a:bodyPr wrap="square"/>
-                    <a:lstStyle/>
-                    <a:p>
-                      <a:r>
-                        <a:rPr sz="1250" b="1" i="0">
+              <a:tr h="548640">
+                <a:tc>
+                  <a:txBody>
+                    <a:bodyPr wrap="square"/>
+                    <a:lstStyle/>
+                    <a:p>
+                      <a:r>
+                        <a:rPr sz="1500" b="1" i="0">
                           <a:solidFill>
                             <a:srgbClr val="222222"/>
                           </a:solidFill>
@@ -3663,7 +3663,7 @@
                     <a:lstStyle/>
                     <a:p>
                       <a:r>
-                        <a:rPr sz="1250" b="0" i="0">
+                        <a:rPr sz="1500" b="0" i="0">
                           <a:solidFill>
                             <a:srgbClr val="222222"/>
                           </a:solidFill>
@@ -3686,7 +3686,7 @@
                     <a:lstStyle/>
                     <a:p>
                       <a:r>
-                        <a:rPr sz="1250" b="0" i="0">
+                        <a:rPr sz="1500" b="0" i="0">
                           <a:solidFill>
                             <a:srgbClr val="222222"/>
                           </a:solidFill>
@@ -3704,14 +3704,14 @@
                   </a:tcPr>
                 </a:tc>
               </a:tr>
-              <a:tr h="435229">
-                <a:tc>
-                  <a:txBody>
-                    <a:bodyPr wrap="square"/>
-                    <a:lstStyle/>
-                    <a:p>
-                      <a:r>
-                        <a:rPr sz="1250" b="1" i="0">
+              <a:tr h="548640">
+                <a:tc>
+                  <a:txBody>
+                    <a:bodyPr wrap="square"/>
+                    <a:lstStyle/>
+                    <a:p>
+                      <a:r>
+                        <a:rPr sz="1500" b="1" i="0">
                           <a:solidFill>
                             <a:srgbClr val="222222"/>
                           </a:solidFill>
@@ -3734,7 +3734,7 @@
                     <a:lstStyle/>
                     <a:p>
                       <a:r>
-                        <a:rPr sz="1250" b="0" i="0">
+                        <a:rPr sz="1500" b="0" i="0">
                           <a:solidFill>
                             <a:srgbClr val="222222"/>
                           </a:solidFill>
@@ -3757,7 +3757,7 @@
                     <a:lstStyle/>
                     <a:p>
                       <a:r>
-                        <a:rPr sz="1250" b="0" i="0">
+                        <a:rPr sz="1500" b="0" i="0">
                           <a:solidFill>
                             <a:srgbClr val="222222"/>
                           </a:solidFill>
@@ -3775,14 +3775,14 @@
                   </a:tcPr>
                 </a:tc>
               </a:tr>
-              <a:tr h="435229">
-                <a:tc>
-                  <a:txBody>
-                    <a:bodyPr wrap="square"/>
-                    <a:lstStyle/>
-                    <a:p>
-                      <a:r>
-                        <a:rPr sz="1250" b="1" i="0">
+              <a:tr h="548640">
+                <a:tc>
+                  <a:txBody>
+                    <a:bodyPr wrap="square"/>
+                    <a:lstStyle/>
+                    <a:p>
+                      <a:r>
+                        <a:rPr sz="1500" b="1" i="0">
                           <a:solidFill>
                             <a:srgbClr val="222222"/>
                           </a:solidFill>
@@ -3805,7 +3805,7 @@
                     <a:lstStyle/>
                     <a:p>
                       <a:r>
-                        <a:rPr sz="1250" b="0" i="0">
+                        <a:rPr sz="1500" b="0" i="0">
                           <a:solidFill>
                             <a:srgbClr val="222222"/>
                           </a:solidFill>
@@ -3828,7 +3828,7 @@
                     <a:lstStyle/>
                     <a:p>
                       <a:r>
-                        <a:rPr sz="1250" b="0" i="0">
+                        <a:rPr sz="1500" b="0" i="0">
                           <a:solidFill>
                             <a:srgbClr val="222222"/>
                           </a:solidFill>
@@ -3846,14 +3846,14 @@
                   </a:tcPr>
                 </a:tc>
               </a:tr>
-              <a:tr h="435229">
-                <a:tc>
-                  <a:txBody>
-                    <a:bodyPr wrap="square"/>
-                    <a:lstStyle/>
-                    <a:p>
-                      <a:r>
-                        <a:rPr sz="1250" b="1" i="0">
+              <a:tr h="548640">
+                <a:tc>
+                  <a:txBody>
+                    <a:bodyPr wrap="square"/>
+                    <a:lstStyle/>
+                    <a:p>
+                      <a:r>
+                        <a:rPr sz="1500" b="1" i="0">
                           <a:solidFill>
                             <a:srgbClr val="222222"/>
                           </a:solidFill>
@@ -3876,7 +3876,7 @@
                     <a:lstStyle/>
                     <a:p>
                       <a:r>
-                        <a:rPr sz="1250" b="0" i="0">
+                        <a:rPr sz="1500" b="0" i="0">
                           <a:solidFill>
                             <a:srgbClr val="222222"/>
                           </a:solidFill>
@@ -3899,7 +3899,7 @@
                     <a:lstStyle/>
                     <a:p>
                       <a:r>
-                        <a:rPr sz="1250" b="0" i="0">
+                        <a:rPr sz="1500" b="0" i="0">
                           <a:solidFill>
                             <a:srgbClr val="222222"/>
                           </a:solidFill>
@@ -3929,8 +3929,8 @@
         </p:nvSpPr>
         <p:spPr>
           <a:xfrm>
-            <a:off x="457200" y="3319145"/>
-            <a:ext cx="11277295" cy="1627632"/>
+            <a:off x="457200" y="3886200"/>
+            <a:ext cx="11277295" cy="1970532"/>
           </a:xfrm>
           <a:prstGeom prst="rect">
             <a:avLst/>
@@ -3949,7 +3949,7 @@
               </a:spcAft>
             </a:pPr>
             <a:r>
-              <a:rPr sz="1600" b="0" i="0">
+              <a:rPr sz="2000" b="0" i="0">
                 <a:solidFill>
                   <a:srgbClr val="222222"/>
                 </a:solidFill>
@@ -3966,7 +3966,7 @@
               </a:spcAft>
             </a:pPr>
             <a:r>
-              <a:rPr sz="1600" b="0" i="0">
+              <a:rPr sz="2000" b="0" i="0">
                 <a:solidFill>
                   <a:srgbClr val="222222"/>
                 </a:solidFill>
@@ -3983,7 +3983,7 @@
               </a:spcAft>
             </a:pPr>
             <a:r>
-              <a:rPr sz="1600" b="0" i="0">
+              <a:rPr sz="2000" b="0" i="0">
                 <a:solidFill>
                   <a:srgbClr val="222222"/>
                 </a:solidFill>
@@ -4358,7 +4358,7 @@
         </p:nvGraphicFramePr>
         <p:xfrm>
           <a:off x="457200" y="1143000"/>
-          <a:ext cx="11277294" cy="2304161"/>
+          <a:ext cx="11277294" cy="2871216"/>
         </p:xfrm>
         <a:graphic>
           <a:graphicData uri="http://schemas.openxmlformats.org/drawingml/2006/table">
@@ -4367,18 +4367,18 @@
                 <a:tableStyleId>{5C22544A-7EE6-4342-B048-85BDC9FD1C3A}</a:tableStyleId>
               </a:tblPr>
               <a:tblGrid>
-                <a:gridCol w="1537812"/>
-                <a:gridCol w="3417362"/>
-                <a:gridCol w="6322120"/>
+                <a:gridCol w="1824268"/>
+                <a:gridCol w="3316851"/>
+                <a:gridCol w="6136175"/>
               </a:tblGrid>
-              <a:tr h="384026">
-                <a:tc>
-                  <a:txBody>
-                    <a:bodyPr wrap="square"/>
-                    <a:lstStyle/>
-                    <a:p>
-                      <a:r>
-                        <a:rPr sz="1250" b="1" i="0">
+              <a:tr h="478536">
+                <a:tc>
+                  <a:txBody>
+                    <a:bodyPr wrap="square"/>
+                    <a:lstStyle/>
+                    <a:p>
+                      <a:r>
+                        <a:rPr sz="1500" b="1" i="0">
                           <a:solidFill>
                             <a:srgbClr val="FFFFFF"/>
                           </a:solidFill>
@@ -4401,7 +4401,7 @@
                     <a:lstStyle/>
                     <a:p>
                       <a:r>
-                        <a:rPr sz="1250" b="1" i="0">
+                        <a:rPr sz="1500" b="1" i="0">
                           <a:solidFill>
                             <a:srgbClr val="FFFFFF"/>
                           </a:solidFill>
@@ -4424,7 +4424,7 @@
                     <a:lstStyle/>
                     <a:p>
                       <a:r>
-                        <a:rPr sz="1250" b="1" i="0">
+                        <a:rPr sz="1500" b="1" i="0">
                           <a:solidFill>
                             <a:srgbClr val="FFFFFF"/>
                           </a:solidFill>
@@ -4442,14 +4442,14 @@
                   </a:tcPr>
                 </a:tc>
               </a:tr>
-              <a:tr h="384026">
-                <a:tc>
-                  <a:txBody>
-                    <a:bodyPr wrap="square"/>
-                    <a:lstStyle/>
-                    <a:p>
-                      <a:r>
-                        <a:rPr sz="1250" b="1" i="0">
+              <a:tr h="478536">
+                <a:tc>
+                  <a:txBody>
+                    <a:bodyPr wrap="square"/>
+                    <a:lstStyle/>
+                    <a:p>
+                      <a:r>
+                        <a:rPr sz="1500" b="1" i="0">
                           <a:solidFill>
                             <a:srgbClr val="222222"/>
                           </a:solidFill>
@@ -4472,7 +4472,7 @@
                     <a:lstStyle/>
                     <a:p>
                       <a:r>
-                        <a:rPr sz="1250" b="0" i="0">
+                        <a:rPr sz="1500" b="0" i="0">
                           <a:solidFill>
                             <a:srgbClr val="222222"/>
                           </a:solidFill>
@@ -4495,7 +4495,7 @@
                     <a:lstStyle/>
                     <a:p>
                       <a:r>
-                        <a:rPr sz="1250" b="0" i="0">
+                        <a:rPr sz="1500" b="0" i="0">
                           <a:solidFill>
                             <a:srgbClr val="222222"/>
                           </a:solidFill>
@@ -4513,14 +4513,14 @@
                   </a:tcPr>
                 </a:tc>
               </a:tr>
-              <a:tr h="384026">
-                <a:tc>
-                  <a:txBody>
-                    <a:bodyPr wrap="square"/>
-                    <a:lstStyle/>
-                    <a:p>
-                      <a:r>
-                        <a:rPr sz="1250" b="1" i="0">
+              <a:tr h="478536">
+                <a:tc>
+                  <a:txBody>
+                    <a:bodyPr wrap="square"/>
+                    <a:lstStyle/>
+                    <a:p>
+                      <a:r>
+                        <a:rPr sz="1500" b="1" i="0">
                           <a:solidFill>
                             <a:srgbClr val="222222"/>
                           </a:solidFill>
@@ -4543,7 +4543,7 @@
                     <a:lstStyle/>
                     <a:p>
                       <a:r>
-                        <a:rPr sz="1250" b="0" i="0">
+                        <a:rPr sz="1500" b="0" i="0">
                           <a:solidFill>
                             <a:srgbClr val="222222"/>
                           </a:solidFill>
@@ -4566,7 +4566,7 @@
                     <a:lstStyle/>
                     <a:p>
                       <a:r>
-                        <a:rPr sz="1250" b="0" i="0">
+                        <a:rPr sz="1500" b="0" i="0">
                           <a:solidFill>
                             <a:srgbClr val="222222"/>
                           </a:solidFill>
@@ -4584,14 +4584,14 @@
                   </a:tcPr>
                 </a:tc>
               </a:tr>
-              <a:tr h="384026">
-                <a:tc>
-                  <a:txBody>
-                    <a:bodyPr wrap="square"/>
-                    <a:lstStyle/>
-                    <a:p>
-                      <a:r>
-                        <a:rPr sz="1250" b="1" i="0">
+              <a:tr h="478536">
+                <a:tc>
+                  <a:txBody>
+                    <a:bodyPr wrap="square"/>
+                    <a:lstStyle/>
+                    <a:p>
+                      <a:r>
+                        <a:rPr sz="1500" b="1" i="0">
                           <a:solidFill>
                             <a:srgbClr val="222222"/>
                           </a:solidFill>
@@ -4614,7 +4614,7 @@
                     <a:lstStyle/>
                     <a:p>
                       <a:r>
-                        <a:rPr sz="1250" b="0" i="0">
+                        <a:rPr sz="1500" b="0" i="0">
                           <a:solidFill>
                             <a:srgbClr val="222222"/>
                           </a:solidFill>
@@ -4637,7 +4637,7 @@
                     <a:lstStyle/>
                     <a:p>
                       <a:r>
-                        <a:rPr sz="1250" b="0" i="0">
+                        <a:rPr sz="1500" b="0" i="0">
                           <a:solidFill>
                             <a:srgbClr val="222222"/>
                           </a:solidFill>
@@ -4655,14 +4655,14 @@
                   </a:tcPr>
                 </a:tc>
               </a:tr>
-              <a:tr h="384026">
-                <a:tc>
-                  <a:txBody>
-                    <a:bodyPr wrap="square"/>
-                    <a:lstStyle/>
-                    <a:p>
-                      <a:r>
-                        <a:rPr sz="1250" b="1" i="0">
+              <a:tr h="478536">
+                <a:tc>
+                  <a:txBody>
+                    <a:bodyPr wrap="square"/>
+                    <a:lstStyle/>
+                    <a:p>
+                      <a:r>
+                        <a:rPr sz="1500" b="1" i="0">
                           <a:solidFill>
                             <a:srgbClr val="222222"/>
                           </a:solidFill>
@@ -4685,7 +4685,7 @@
                     <a:lstStyle/>
                     <a:p>
                       <a:r>
-                        <a:rPr sz="1250" b="0" i="0">
+                        <a:rPr sz="1500" b="0" i="0">
                           <a:solidFill>
                             <a:srgbClr val="222222"/>
                           </a:solidFill>
@@ -4708,7 +4708,7 @@
                     <a:lstStyle/>
                     <a:p>
                       <a:r>
-                        <a:rPr sz="1250" b="0" i="0">
+                        <a:rPr sz="1500" b="0" i="0">
                           <a:solidFill>
                             <a:srgbClr val="222222"/>
                           </a:solidFill>
@@ -4726,14 +4726,14 @@
                   </a:tcPr>
                 </a:tc>
               </a:tr>
-              <a:tr h="384031">
-                <a:tc>
-                  <a:txBody>
-                    <a:bodyPr wrap="square"/>
-                    <a:lstStyle/>
-                    <a:p>
-                      <a:r>
-                        <a:rPr sz="1250" b="1" i="0">
+              <a:tr h="478536">
+                <a:tc>
+                  <a:txBody>
+                    <a:bodyPr wrap="square"/>
+                    <a:lstStyle/>
+                    <a:p>
+                      <a:r>
+                        <a:rPr sz="1500" b="1" i="0">
                           <a:solidFill>
                             <a:srgbClr val="222222"/>
                           </a:solidFill>
@@ -4756,7 +4756,7 @@
                     <a:lstStyle/>
                     <a:p>
                       <a:r>
-                        <a:rPr sz="1250" b="0" i="0">
+                        <a:rPr sz="1500" b="0" i="0">
                           <a:solidFill>
                             <a:srgbClr val="222222"/>
                           </a:solidFill>
@@ -4779,7 +4779,7 @@
                     <a:lstStyle/>
                     <a:p>
                       <a:r>
-                        <a:rPr sz="1250" b="0" i="0">
+                        <a:rPr sz="1500" b="0" i="0">
                           <a:solidFill>
                             <a:srgbClr val="222222"/>
                           </a:solidFill>
@@ -5022,7 +5022,7 @@
         <p:spPr>
           <a:xfrm>
             <a:off x="457200" y="1143000"/>
-            <a:ext cx="11277295" cy="3931920"/>
+            <a:ext cx="11277295" cy="5171846"/>
           </a:xfrm>
           <a:prstGeom prst="rect">
             <a:avLst/>
@@ -5041,7 +5041,7 @@
               </a:spcAft>
             </a:pPr>
             <a:r>
-              <a:rPr sz="1600" b="0" i="0">
+              <a:rPr sz="1888" b="0" i="0">
                 <a:solidFill>
                   <a:srgbClr val="222222"/>
                 </a:solidFill>
@@ -5058,7 +5058,7 @@
               </a:spcAft>
             </a:pPr>
             <a:r>
-              <a:rPr sz="1600" b="0" i="0">
+              <a:rPr sz="1888" b="0" i="0">
                 <a:solidFill>
                   <a:srgbClr val="222222"/>
                 </a:solidFill>
@@ -5075,7 +5075,7 @@
               </a:spcAft>
             </a:pPr>
             <a:r>
-              <a:rPr sz="1600" b="0" i="0">
+              <a:rPr sz="1888" b="0" i="0">
                 <a:solidFill>
                   <a:srgbClr val="222222"/>
                 </a:solidFill>
@@ -5092,7 +5092,7 @@
               </a:spcAft>
             </a:pPr>
             <a:r>
-              <a:rPr sz="1600" b="0" i="0">
+              <a:rPr sz="1888" b="0" i="0">
                 <a:solidFill>
                   <a:srgbClr val="222222"/>
                 </a:solidFill>
@@ -5109,7 +5109,7 @@
               </a:spcAft>
             </a:pPr>
             <a:r>
-              <a:rPr sz="1500" b="0" i="0">
+              <a:rPr sz="1788" b="0" i="0">
                 <a:solidFill>
                   <a:srgbClr val="374151"/>
                 </a:solidFill>
@@ -5126,7 +5126,7 @@
               </a:spcAft>
             </a:pPr>
             <a:r>
-              <a:rPr sz="1500" b="0" i="0">
+              <a:rPr sz="1788" b="0" i="0">
                 <a:solidFill>
                   <a:srgbClr val="374151"/>
                 </a:solidFill>
@@ -5143,7 +5143,7 @@
               </a:spcAft>
             </a:pPr>
             <a:r>
-              <a:rPr sz="1500" b="0" i="0">
+              <a:rPr sz="1788" b="0" i="0">
                 <a:solidFill>
                   <a:srgbClr val="374151"/>
                 </a:solidFill>
@@ -5160,7 +5160,7 @@
               </a:spcAft>
             </a:pPr>
             <a:r>
-              <a:rPr sz="1500" b="0" i="0">
+              <a:rPr sz="1788" b="0" i="0">
                 <a:solidFill>
                   <a:srgbClr val="374151"/>
                 </a:solidFill>
@@ -5177,7 +5177,7 @@
               </a:spcAft>
             </a:pPr>
             <a:r>
-              <a:rPr sz="1500" b="0" i="0">
+              <a:rPr sz="1788" b="0" i="0">
                 <a:solidFill>
                   <a:srgbClr val="374151"/>
                 </a:solidFill>
@@ -5194,7 +5194,7 @@
               </a:spcAft>
             </a:pPr>
             <a:r>
-              <a:rPr sz="1600" b="0" i="0">
+              <a:rPr sz="1888" b="0" i="0">
                 <a:solidFill>
                   <a:srgbClr val="222222"/>
                 </a:solidFill>
@@ -5568,7 +5568,7 @@
         <p:spPr>
           <a:xfrm>
             <a:off x="457200" y="1143000"/>
-            <a:ext cx="11277295" cy="1901952"/>
+            <a:ext cx="11277295" cy="2656332"/>
           </a:xfrm>
           <a:prstGeom prst="rect">
             <a:avLst/>
@@ -5587,7 +5587,7 @@
               </a:spcAft>
             </a:pPr>
             <a:r>
-              <a:rPr sz="1600" b="0" i="0">
+              <a:rPr sz="2000" b="0" i="0">
                 <a:solidFill>
                   <a:srgbClr val="222222"/>
                 </a:solidFill>
@@ -5604,7 +5604,7 @@
               </a:spcAft>
             </a:pPr>
             <a:r>
-              <a:rPr sz="1600" b="0" i="0">
+              <a:rPr sz="2000" b="0" i="0">
                 <a:solidFill>
                   <a:srgbClr val="222222"/>
                 </a:solidFill>
@@ -5621,7 +5621,7 @@
               </a:spcAft>
             </a:pPr>
             <a:r>
-              <a:rPr sz="1600" b="0" i="0">
+              <a:rPr sz="2000" b="0" i="0">
                 <a:solidFill>
                   <a:srgbClr val="222222"/>
                 </a:solidFill>
@@ -5855,7 +5855,7 @@
         </p:nvGraphicFramePr>
         <p:xfrm>
           <a:off x="457200" y="1143000"/>
-          <a:ext cx="11277293" cy="2510536"/>
+          <a:ext cx="11277293" cy="3625596"/>
         </p:xfrm>
         <a:graphic>
           <a:graphicData uri="http://schemas.openxmlformats.org/drawingml/2006/table">
@@ -5864,18 +5864,18 @@
                 <a:tableStyleId>{5C22544A-7EE6-4342-B048-85BDC9FD1C3A}</a:tableStyleId>
               </a:tblPr>
               <a:tblGrid>
-                <a:gridCol w="474833"/>
-                <a:gridCol w="5104459"/>
-                <a:gridCol w="5698001"/>
+                <a:gridCol w="1216178"/>
+                <a:gridCol w="4754153"/>
+                <a:gridCol w="5306962"/>
               </a:tblGrid>
-              <a:tr h="418422">
-                <a:tc>
-                  <a:txBody>
-                    <a:bodyPr wrap="square"/>
-                    <a:lstStyle/>
-                    <a:p>
-                      <a:r>
-                        <a:rPr sz="1250" b="1" i="0">
+              <a:tr h="604266">
+                <a:tc>
+                  <a:txBody>
+                    <a:bodyPr wrap="square"/>
+                    <a:lstStyle/>
+                    <a:p>
+                      <a:r>
+                        <a:rPr sz="1500" b="1" i="0">
                           <a:solidFill>
                             <a:srgbClr val="FFFFFF"/>
                           </a:solidFill>
@@ -5898,7 +5898,7 @@
                     <a:lstStyle/>
                     <a:p>
                       <a:r>
-                        <a:rPr sz="1250" b="1" i="0">
+                        <a:rPr sz="1500" b="1" i="0">
                           <a:solidFill>
                             <a:srgbClr val="FFFFFF"/>
                           </a:solidFill>
@@ -5921,7 +5921,7 @@
                     <a:lstStyle/>
                     <a:p>
                       <a:r>
-                        <a:rPr sz="1250" b="1" i="0">
+                        <a:rPr sz="1500" b="1" i="0">
                           <a:solidFill>
                             <a:srgbClr val="FFFFFF"/>
                           </a:solidFill>
@@ -5939,14 +5939,14 @@
                   </a:tcPr>
                 </a:tc>
               </a:tr>
-              <a:tr h="418422">
-                <a:tc>
-                  <a:txBody>
-                    <a:bodyPr wrap="square"/>
-                    <a:lstStyle/>
-                    <a:p>
-                      <a:r>
-                        <a:rPr sz="1250" b="1" i="0">
+              <a:tr h="604266">
+                <a:tc>
+                  <a:txBody>
+                    <a:bodyPr wrap="square"/>
+                    <a:lstStyle/>
+                    <a:p>
+                      <a:r>
+                        <a:rPr sz="1500" b="1" i="0">
                           <a:solidFill>
                             <a:srgbClr val="222222"/>
                           </a:solidFill>
@@ -5969,7 +5969,7 @@
                     <a:lstStyle/>
                     <a:p>
                       <a:r>
-                        <a:rPr sz="1250" b="0" i="0">
+                        <a:rPr sz="1500" b="0" i="0">
                           <a:solidFill>
                             <a:srgbClr val="222222"/>
                           </a:solidFill>
@@ -5992,7 +5992,7 @@
                     <a:lstStyle/>
                     <a:p>
                       <a:r>
-                        <a:rPr sz="1250" b="0" i="0">
+                        <a:rPr sz="1500" b="0" i="0">
                           <a:solidFill>
                             <a:srgbClr val="222222"/>
                           </a:solidFill>
@@ -6010,14 +6010,14 @@
                   </a:tcPr>
                 </a:tc>
               </a:tr>
-              <a:tr h="418422">
-                <a:tc>
-                  <a:txBody>
-                    <a:bodyPr wrap="square"/>
-                    <a:lstStyle/>
-                    <a:p>
-                      <a:r>
-                        <a:rPr sz="1250" b="1" i="0">
+              <a:tr h="604266">
+                <a:tc>
+                  <a:txBody>
+                    <a:bodyPr wrap="square"/>
+                    <a:lstStyle/>
+                    <a:p>
+                      <a:r>
+                        <a:rPr sz="1500" b="1" i="0">
                           <a:solidFill>
                             <a:srgbClr val="222222"/>
                           </a:solidFill>
@@ -6040,7 +6040,7 @@
                     <a:lstStyle/>
                     <a:p>
                       <a:r>
-                        <a:rPr sz="1250" b="0" i="0">
+                        <a:rPr sz="1500" b="0" i="0">
                           <a:solidFill>
                             <a:srgbClr val="222222"/>
                           </a:solidFill>
@@ -6063,7 +6063,7 @@
                     <a:lstStyle/>
                     <a:p>
                       <a:r>
-                        <a:rPr sz="1250" b="0" i="0">
+                        <a:rPr sz="1500" b="0" i="0">
                           <a:solidFill>
                             <a:srgbClr val="222222"/>
                           </a:solidFill>
@@ -6081,14 +6081,14 @@
                   </a:tcPr>
                 </a:tc>
               </a:tr>
-              <a:tr h="418422">
-                <a:tc>
-                  <a:txBody>
-                    <a:bodyPr wrap="square"/>
-                    <a:lstStyle/>
-                    <a:p>
-                      <a:r>
-                        <a:rPr sz="1250" b="1" i="0">
+              <a:tr h="604266">
+                <a:tc>
+                  <a:txBody>
+                    <a:bodyPr wrap="square"/>
+                    <a:lstStyle/>
+                    <a:p>
+                      <a:r>
+                        <a:rPr sz="1500" b="1" i="0">
                           <a:solidFill>
                             <a:srgbClr val="222222"/>
                           </a:solidFill>
@@ -6111,7 +6111,7 @@
                     <a:lstStyle/>
                     <a:p>
                       <a:r>
-                        <a:rPr sz="1250" b="0" i="0">
+                        <a:rPr sz="1500" b="0" i="0">
                           <a:solidFill>
                             <a:srgbClr val="222222"/>
                           </a:solidFill>
@@ -6134,7 +6134,7 @@
                     <a:lstStyle/>
                     <a:p>
                       <a:r>
-                        <a:rPr sz="1250" b="0" i="0">
+                        <a:rPr sz="1500" b="0" i="0">
                           <a:solidFill>
                             <a:srgbClr val="222222"/>
                           </a:solidFill>
@@ -6152,14 +6152,14 @@
                   </a:tcPr>
                 </a:tc>
               </a:tr>
-              <a:tr h="418422">
-                <a:tc>
-                  <a:txBody>
-                    <a:bodyPr wrap="square"/>
-                    <a:lstStyle/>
-                    <a:p>
-                      <a:r>
-                        <a:rPr sz="1250" b="1" i="0">
+              <a:tr h="604266">
+                <a:tc>
+                  <a:txBody>
+                    <a:bodyPr wrap="square"/>
+                    <a:lstStyle/>
+                    <a:p>
+                      <a:r>
+                        <a:rPr sz="1500" b="1" i="0">
                           <a:solidFill>
                             <a:srgbClr val="222222"/>
                           </a:solidFill>
@@ -6182,7 +6182,7 @@
                     <a:lstStyle/>
                     <a:p>
                       <a:r>
-                        <a:rPr sz="1250" b="0" i="0">
+                        <a:rPr sz="1500" b="0" i="0">
                           <a:solidFill>
                             <a:srgbClr val="222222"/>
                           </a:solidFill>
@@ -6205,7 +6205,7 @@
                     <a:lstStyle/>
                     <a:p>
                       <a:r>
-                        <a:rPr sz="1250" b="0" i="0">
+                        <a:rPr sz="1500" b="0" i="0">
                           <a:solidFill>
                             <a:srgbClr val="222222"/>
                           </a:solidFill>
@@ -6223,14 +6223,14 @@
                   </a:tcPr>
                 </a:tc>
               </a:tr>
-              <a:tr h="418426">
-                <a:tc>
-                  <a:txBody>
-                    <a:bodyPr wrap="square"/>
-                    <a:lstStyle/>
-                    <a:p>
-                      <a:r>
-                        <a:rPr sz="1250" b="1" i="0">
+              <a:tr h="604266">
+                <a:tc>
+                  <a:txBody>
+                    <a:bodyPr wrap="square"/>
+                    <a:lstStyle/>
+                    <a:p>
+                      <a:r>
+                        <a:rPr sz="1500" b="1" i="0">
                           <a:solidFill>
                             <a:srgbClr val="222222"/>
                           </a:solidFill>
@@ -6253,7 +6253,7 @@
                     <a:lstStyle/>
                     <a:p>
                       <a:r>
-                        <a:rPr sz="1250" b="0" i="0">
+                        <a:rPr sz="1500" b="0" i="0">
                           <a:solidFill>
                             <a:srgbClr val="222222"/>
                           </a:solidFill>
@@ -6276,7 +6276,7 @@
                     <a:lstStyle/>
                     <a:p>
                       <a:r>
-                        <a:rPr sz="1250" b="0" i="0">
+                        <a:rPr sz="1500" b="0" i="0">
                           <a:solidFill>
                             <a:srgbClr val="222222"/>
                           </a:solidFill>
@@ -6306,8 +6306,8 @@
         </p:nvSpPr>
         <p:spPr>
           <a:xfrm>
-            <a:off x="457200" y="3653536"/>
-            <a:ext cx="11277295" cy="1024128"/>
+            <a:off x="457200" y="4768596"/>
+            <a:ext cx="11277295" cy="1572768"/>
           </a:xfrm>
           <a:prstGeom prst="rect">
             <a:avLst/>
@@ -6326,7 +6326,7 @@
               </a:spcAft>
             </a:pPr>
             <a:r>
-              <a:rPr sz="1600" b="0" i="0">
+              <a:rPr sz="2000" b="0" i="0">
                 <a:solidFill>
                   <a:srgbClr val="222222"/>
                 </a:solidFill>
@@ -6343,7 +6343,7 @@
               </a:spcAft>
             </a:pPr>
             <a:r>
-              <a:rPr sz="1600" b="0" i="0">
+              <a:rPr sz="2000" b="0" i="0">
                 <a:solidFill>
                   <a:srgbClr val="222222"/>
                 </a:solidFill>
@@ -6577,7 +6577,7 @@
         </p:nvGraphicFramePr>
         <p:xfrm>
           <a:off x="457200" y="1143000"/>
-          <a:ext cx="11277294" cy="2382520"/>
+          <a:ext cx="11277294" cy="3246120"/>
         </p:xfrm>
         <a:graphic>
           <a:graphicData uri="http://schemas.openxmlformats.org/drawingml/2006/table">
@@ -6590,14 +6590,14 @@
                 <a:gridCol w="6207685"/>
                 <a:gridCol w="3310765"/>
               </a:tblGrid>
-              <a:tr h="476504">
-                <a:tc>
-                  <a:txBody>
-                    <a:bodyPr wrap="square"/>
-                    <a:lstStyle/>
-                    <a:p>
-                      <a:r>
-                        <a:rPr sz="1250" b="1" i="0">
+              <a:tr h="649224">
+                <a:tc>
+                  <a:txBody>
+                    <a:bodyPr wrap="square"/>
+                    <a:lstStyle/>
+                    <a:p>
+                      <a:r>
+                        <a:rPr sz="1500" b="1" i="0">
                           <a:solidFill>
                             <a:srgbClr val="FFFFFF"/>
                           </a:solidFill>
@@ -6620,7 +6620,7 @@
                     <a:lstStyle/>
                     <a:p>
                       <a:r>
-                        <a:rPr sz="1250" b="1" i="0">
+                        <a:rPr sz="1500" b="1" i="0">
                           <a:solidFill>
                             <a:srgbClr val="FFFFFF"/>
                           </a:solidFill>
@@ -6643,7 +6643,7 @@
                     <a:lstStyle/>
                     <a:p>
                       <a:r>
-                        <a:rPr sz="1250" b="1" i="0">
+                        <a:rPr sz="1500" b="1" i="0">
                           <a:solidFill>
                             <a:srgbClr val="FFFFFF"/>
                           </a:solidFill>
@@ -6661,14 +6661,14 @@
                   </a:tcPr>
                 </a:tc>
               </a:tr>
-              <a:tr h="476504">
-                <a:tc>
-                  <a:txBody>
-                    <a:bodyPr wrap="square"/>
-                    <a:lstStyle/>
-                    <a:p>
-                      <a:r>
-                        <a:rPr sz="1250" b="1" i="0">
+              <a:tr h="649224">
+                <a:tc>
+                  <a:txBody>
+                    <a:bodyPr wrap="square"/>
+                    <a:lstStyle/>
+                    <a:p>
+                      <a:r>
+                        <a:rPr sz="1500" b="1" i="0">
                           <a:solidFill>
                             <a:srgbClr val="222222"/>
                           </a:solidFill>
@@ -6691,7 +6691,7 @@
                     <a:lstStyle/>
                     <a:p>
                       <a:r>
-                        <a:rPr sz="1250" b="0" i="0">
+                        <a:rPr sz="1500" b="0" i="0">
                           <a:solidFill>
                             <a:srgbClr val="222222"/>
                           </a:solidFill>
@@ -6714,7 +6714,7 @@
                     <a:lstStyle/>
                     <a:p>
                       <a:r>
-                        <a:rPr sz="1250" b="0" i="0">
+                        <a:rPr sz="1500" b="0" i="0">
                           <a:solidFill>
                             <a:srgbClr val="222222"/>
                           </a:solidFill>
@@ -6732,14 +6732,14 @@
                   </a:tcPr>
                 </a:tc>
               </a:tr>
-              <a:tr h="476504">
-                <a:tc>
-                  <a:txBody>
-                    <a:bodyPr wrap="square"/>
-                    <a:lstStyle/>
-                    <a:p>
-                      <a:r>
-                        <a:rPr sz="1250" b="1" i="0">
+              <a:tr h="649224">
+                <a:tc>
+                  <a:txBody>
+                    <a:bodyPr wrap="square"/>
+                    <a:lstStyle/>
+                    <a:p>
+                      <a:r>
+                        <a:rPr sz="1500" b="1" i="0">
                           <a:solidFill>
                             <a:srgbClr val="222222"/>
                           </a:solidFill>
@@ -6762,7 +6762,7 @@
                     <a:lstStyle/>
                     <a:p>
                       <a:r>
-                        <a:rPr sz="1250" b="0" i="0">
+                        <a:rPr sz="1500" b="0" i="0">
                           <a:solidFill>
                             <a:srgbClr val="222222"/>
                           </a:solidFill>
@@ -6785,7 +6785,7 @@
                     <a:lstStyle/>
                     <a:p>
                       <a:r>
-                        <a:rPr sz="1250" b="0" i="0">
+                        <a:rPr sz="1500" b="0" i="0">
                           <a:solidFill>
                             <a:srgbClr val="222222"/>
                           </a:solidFill>
@@ -6803,14 +6803,14 @@
                   </a:tcPr>
                 </a:tc>
               </a:tr>
-              <a:tr h="476504">
-                <a:tc>
-                  <a:txBody>
-                    <a:bodyPr wrap="square"/>
-                    <a:lstStyle/>
-                    <a:p>
-                      <a:r>
-                        <a:rPr sz="1250" b="1" i="0">
+              <a:tr h="649224">
+                <a:tc>
+                  <a:txBody>
+                    <a:bodyPr wrap="square"/>
+                    <a:lstStyle/>
+                    <a:p>
+                      <a:r>
+                        <a:rPr sz="1500" b="1" i="0">
                           <a:solidFill>
                             <a:srgbClr val="222222"/>
                           </a:solidFill>
@@ -6833,7 +6833,7 @@
                     <a:lstStyle/>
                     <a:p>
                       <a:r>
-                        <a:rPr sz="1250" b="0" i="0">
+                        <a:rPr sz="1500" b="0" i="0">
                           <a:solidFill>
                             <a:srgbClr val="222222"/>
                           </a:solidFill>
@@ -6856,7 +6856,7 @@
                     <a:lstStyle/>
                     <a:p>
                       <a:r>
-                        <a:rPr sz="1250" b="0" i="0">
+                        <a:rPr sz="1500" b="0" i="0">
                           <a:solidFill>
                             <a:srgbClr val="222222"/>
                           </a:solidFill>
@@ -6874,14 +6874,14 @@
                   </a:tcPr>
                 </a:tc>
               </a:tr>
-              <a:tr h="476504">
-                <a:tc>
-                  <a:txBody>
-                    <a:bodyPr wrap="square"/>
-                    <a:lstStyle/>
-                    <a:p>
-                      <a:r>
-                        <a:rPr sz="1250" b="1" i="0">
+              <a:tr h="649224">
+                <a:tc>
+                  <a:txBody>
+                    <a:bodyPr wrap="square"/>
+                    <a:lstStyle/>
+                    <a:p>
+                      <a:r>
+                        <a:rPr sz="1500" b="1" i="0">
                           <a:solidFill>
                             <a:srgbClr val="222222"/>
                           </a:solidFill>
@@ -6904,7 +6904,7 @@
                     <a:lstStyle/>
                     <a:p>
                       <a:r>
-                        <a:rPr sz="1250" b="0" i="0">
+                        <a:rPr sz="1500" b="0" i="0">
                           <a:solidFill>
                             <a:srgbClr val="222222"/>
                           </a:solidFill>
@@ -6927,7 +6927,7 @@
                     <a:lstStyle/>
                     <a:p>
                       <a:r>
-                        <a:rPr sz="1250" b="0" i="0">
+                        <a:rPr sz="1500" b="0" i="0">
                           <a:solidFill>
                             <a:srgbClr val="222222"/>
                           </a:solidFill>
@@ -7171,7 +7171,7 @@
         </p:nvGraphicFramePr>
         <p:xfrm>
           <a:off x="457200" y="1143000"/>
-          <a:ext cx="11277294" cy="2844927"/>
+          <a:ext cx="11277294" cy="4256531"/>
         </p:xfrm>
         <a:graphic>
           <a:graphicData uri="http://schemas.openxmlformats.org/drawingml/2006/table">
@@ -7183,14 +7183,14 @@
                 <a:gridCol w="2285938"/>
                 <a:gridCol w="8991356"/>
               </a:tblGrid>
-              <a:tr h="406418">
-                <a:tc>
-                  <a:txBody>
-                    <a:bodyPr wrap="square"/>
-                    <a:lstStyle/>
-                    <a:p>
-                      <a:r>
-                        <a:rPr sz="1250" b="1" i="0">
+              <a:tr h="608075">
+                <a:tc>
+                  <a:txBody>
+                    <a:bodyPr wrap="square"/>
+                    <a:lstStyle/>
+                    <a:p>
+                      <a:r>
+                        <a:rPr sz="1500" b="1" i="0">
                           <a:solidFill>
                             <a:srgbClr val="FFFFFF"/>
                           </a:solidFill>
@@ -7213,7 +7213,7 @@
                     <a:lstStyle/>
                     <a:p>
                       <a:r>
-                        <a:rPr sz="1250" b="1" i="0">
+                        <a:rPr sz="1500" b="1" i="0">
                           <a:solidFill>
                             <a:srgbClr val="FFFFFF"/>
                           </a:solidFill>
@@ -7231,14 +7231,14 @@
                   </a:tcPr>
                 </a:tc>
               </a:tr>
-              <a:tr h="406418">
-                <a:tc>
-                  <a:txBody>
-                    <a:bodyPr wrap="square"/>
-                    <a:lstStyle/>
-                    <a:p>
-                      <a:r>
-                        <a:rPr sz="1250" b="0" i="0">
+              <a:tr h="608075">
+                <a:tc>
+                  <a:txBody>
+                    <a:bodyPr wrap="square"/>
+                    <a:lstStyle/>
+                    <a:p>
+                      <a:r>
+                        <a:rPr sz="1500" b="0" i="0">
                           <a:solidFill>
                             <a:srgbClr val="222222"/>
                           </a:solidFill>
@@ -7261,7 +7261,7 @@
                     <a:lstStyle/>
                     <a:p>
                       <a:r>
-                        <a:rPr sz="1250" b="0" i="0">
+                        <a:rPr sz="1500" b="0" i="0">
                           <a:solidFill>
                             <a:srgbClr val="222222"/>
                           </a:solidFill>
@@ -7279,14 +7279,14 @@
                   </a:tcPr>
                 </a:tc>
               </a:tr>
-              <a:tr h="406418">
-                <a:tc>
-                  <a:txBody>
-                    <a:bodyPr wrap="square"/>
-                    <a:lstStyle/>
-                    <a:p>
-                      <a:r>
-                        <a:rPr sz="1250" b="0" i="0">
+              <a:tr h="608075">
+                <a:tc>
+                  <a:txBody>
+                    <a:bodyPr wrap="square"/>
+                    <a:lstStyle/>
+                    <a:p>
+                      <a:r>
+                        <a:rPr sz="1500" b="0" i="0">
                           <a:solidFill>
                             <a:srgbClr val="222222"/>
                           </a:solidFill>
@@ -7309,7 +7309,7 @@
                     <a:lstStyle/>
                     <a:p>
                       <a:r>
-                        <a:rPr sz="1250" b="0" i="0">
+                        <a:rPr sz="1500" b="0" i="0">
                           <a:solidFill>
                             <a:srgbClr val="222222"/>
                           </a:solidFill>
@@ -7327,14 +7327,14 @@
                   </a:tcPr>
                 </a:tc>
               </a:tr>
-              <a:tr h="406418">
-                <a:tc>
-                  <a:txBody>
-                    <a:bodyPr wrap="square"/>
-                    <a:lstStyle/>
-                    <a:p>
-                      <a:r>
-                        <a:rPr sz="1250" b="0" i="0">
+              <a:tr h="608075">
+                <a:tc>
+                  <a:txBody>
+                    <a:bodyPr wrap="square"/>
+                    <a:lstStyle/>
+                    <a:p>
+                      <a:r>
+                        <a:rPr sz="1500" b="0" i="0">
                           <a:solidFill>
                             <a:srgbClr val="222222"/>
                           </a:solidFill>
@@ -7357,7 +7357,7 @@
                     <a:lstStyle/>
                     <a:p>
                       <a:r>
-                        <a:rPr sz="1250" b="0" i="0">
+                        <a:rPr sz="1500" b="0" i="0">
                           <a:solidFill>
                             <a:srgbClr val="222222"/>
                           </a:solidFill>
@@ -7375,14 +7375,14 @@
                   </a:tcPr>
                 </a:tc>
               </a:tr>
-              <a:tr h="406418">
-                <a:tc>
-                  <a:txBody>
-                    <a:bodyPr wrap="square"/>
-                    <a:lstStyle/>
-                    <a:p>
-                      <a:r>
-                        <a:rPr sz="1250" b="0" i="0">
+              <a:tr h="608075">
+                <a:tc>
+                  <a:txBody>
+                    <a:bodyPr wrap="square"/>
+                    <a:lstStyle/>
+                    <a:p>
+                      <a:r>
+                        <a:rPr sz="1500" b="0" i="0">
                           <a:solidFill>
                             <a:srgbClr val="222222"/>
                           </a:solidFill>
@@ -7405,7 +7405,7 @@
                     <a:lstStyle/>
                     <a:p>
                       <a:r>
-                        <a:rPr sz="1250" b="0" i="0">
+                        <a:rPr sz="1500" b="0" i="0">
                           <a:solidFill>
                             <a:srgbClr val="222222"/>
                           </a:solidFill>
@@ -7423,14 +7423,14 @@
                   </a:tcPr>
                 </a:tc>
               </a:tr>
-              <a:tr h="406418">
-                <a:tc>
-                  <a:txBody>
-                    <a:bodyPr wrap="square"/>
-                    <a:lstStyle/>
-                    <a:p>
-                      <a:r>
-                        <a:rPr sz="1250" b="0" i="0">
+              <a:tr h="608075">
+                <a:tc>
+                  <a:txBody>
+                    <a:bodyPr wrap="square"/>
+                    <a:lstStyle/>
+                    <a:p>
+                      <a:r>
+                        <a:rPr sz="1500" b="0" i="0">
                           <a:solidFill>
                             <a:srgbClr val="222222"/>
                           </a:solidFill>
@@ -7453,7 +7453,7 @@
                     <a:lstStyle/>
                     <a:p>
                       <a:r>
-                        <a:rPr sz="1250" b="0" i="0">
+                        <a:rPr sz="1500" b="0" i="0">
                           <a:solidFill>
                             <a:srgbClr val="222222"/>
                           </a:solidFill>
@@ -7471,14 +7471,14 @@
                   </a:tcPr>
                 </a:tc>
               </a:tr>
-              <a:tr h="406419">
-                <a:tc>
-                  <a:txBody>
-                    <a:bodyPr wrap="square"/>
-                    <a:lstStyle/>
-                    <a:p>
-                      <a:r>
-                        <a:rPr sz="1250" b="0" i="0">
+              <a:tr h="608081">
+                <a:tc>
+                  <a:txBody>
+                    <a:bodyPr wrap="square"/>
+                    <a:lstStyle/>
+                    <a:p>
+                      <a:r>
+                        <a:rPr sz="1500" b="0" i="0">
                           <a:solidFill>
                             <a:srgbClr val="222222"/>
                           </a:solidFill>
@@ -7501,7 +7501,7 @@
                     <a:lstStyle/>
                     <a:p>
                       <a:r>
-                        <a:rPr sz="1250" b="0" i="0">
+                        <a:rPr sz="1500" b="0" i="0">
                           <a:solidFill>
                             <a:srgbClr val="222222"/>
                           </a:solidFill>
@@ -7744,7 +7744,7 @@
         <p:spPr>
           <a:xfrm>
             <a:off x="457200" y="1143000"/>
-            <a:ext cx="11277295" cy="2231136"/>
+            <a:ext cx="11277295" cy="3054096"/>
           </a:xfrm>
           <a:prstGeom prst="rect">
             <a:avLst/>
@@ -7763,7 +7763,7 @@
               </a:spcAft>
             </a:pPr>
             <a:r>
-              <a:rPr sz="1600" b="0" i="0">
+              <a:rPr sz="2000" b="0" i="0">
                 <a:solidFill>
                   <a:srgbClr val="222222"/>
                 </a:solidFill>
@@ -7780,7 +7780,7 @@
               </a:spcAft>
             </a:pPr>
             <a:r>
-              <a:rPr sz="1600" b="0" i="0">
+              <a:rPr sz="2000" b="0" i="0">
                 <a:solidFill>
                   <a:srgbClr val="222222"/>
                 </a:solidFill>
@@ -7797,7 +7797,7 @@
               </a:spcAft>
             </a:pPr>
             <a:r>
-              <a:rPr sz="1600" b="0" i="0">
+              <a:rPr sz="2000" b="0" i="0">
                 <a:solidFill>
                   <a:srgbClr val="222222"/>
                 </a:solidFill>
@@ -7814,7 +7814,7 @@
               </a:spcAft>
             </a:pPr>
             <a:r>
-              <a:rPr sz="1600" b="0" i="0">
+              <a:rPr sz="2000" b="0" i="0">
                 <a:solidFill>
                   <a:srgbClr val="222222"/>
                 </a:solidFill>
@@ -8047,7 +8047,7 @@
         <p:spPr>
           <a:xfrm>
             <a:off x="457200" y="1143000"/>
-            <a:ext cx="11277295" cy="2505456"/>
+            <a:ext cx="11277295" cy="3396996"/>
           </a:xfrm>
           <a:prstGeom prst="rect">
             <a:avLst/>
@@ -8066,7 +8066,7 @@
               </a:spcAft>
             </a:pPr>
             <a:r>
-              <a:rPr sz="1600" b="0" i="0">
+              <a:rPr sz="2000" b="0" i="0">
                 <a:solidFill>
                   <a:srgbClr val="222222"/>
                 </a:solidFill>
@@ -8083,7 +8083,7 @@
               </a:spcAft>
             </a:pPr>
             <a:r>
-              <a:rPr sz="1600" b="0" i="0">
+              <a:rPr sz="2000" b="0" i="0">
                 <a:solidFill>
                   <a:srgbClr val="222222"/>
                 </a:solidFill>
@@ -8100,7 +8100,7 @@
               </a:spcAft>
             </a:pPr>
             <a:r>
-              <a:rPr sz="1600" b="0" i="0">
+              <a:rPr sz="2000" b="0" i="0">
                 <a:solidFill>
                   <a:srgbClr val="222222"/>
                 </a:solidFill>
@@ -8117,7 +8117,7 @@
               </a:spcAft>
             </a:pPr>
             <a:r>
-              <a:rPr sz="1600" b="0" i="0">
+              <a:rPr sz="2000" b="0" i="0">
                 <a:solidFill>
                   <a:srgbClr val="222222"/>
                 </a:solidFill>
@@ -8491,7 +8491,7 @@
         <p:spPr>
           <a:xfrm>
             <a:off x="457200" y="1143000"/>
-            <a:ext cx="11277295" cy="3328416"/>
+            <a:ext cx="11277295" cy="5042915"/>
           </a:xfrm>
           <a:prstGeom prst="rect">
             <a:avLst/>
@@ -8510,7 +8510,7 @@
               </a:spcAft>
             </a:pPr>
             <a:r>
-              <a:rPr sz="1600" b="0" i="0">
+              <a:rPr sz="2000" b="0" i="0">
                 <a:solidFill>
                   <a:srgbClr val="222222"/>
                 </a:solidFill>
@@ -8527,7 +8527,7 @@
               </a:spcAft>
             </a:pPr>
             <a:r>
-              <a:rPr sz="1600" b="0" i="0">
+              <a:rPr sz="2000" b="0" i="0">
                 <a:solidFill>
                   <a:srgbClr val="222222"/>
                 </a:solidFill>
@@ -8544,7 +8544,7 @@
               </a:spcAft>
             </a:pPr>
             <a:r>
-              <a:rPr sz="1600" b="0" i="0">
+              <a:rPr sz="2000" b="0" i="0">
                 <a:solidFill>
                   <a:srgbClr val="222222"/>
                 </a:solidFill>
@@ -8561,7 +8561,7 @@
               </a:spcAft>
             </a:pPr>
             <a:r>
-              <a:rPr sz="1500" b="0" i="0">
+              <a:rPr sz="1900" b="0" i="0">
                 <a:solidFill>
                   <a:srgbClr val="374151"/>
                 </a:solidFill>
@@ -8578,7 +8578,7 @@
               </a:spcAft>
             </a:pPr>
             <a:r>
-              <a:rPr sz="1500" b="0" i="0">
+              <a:rPr sz="1900" b="0" i="0">
                 <a:solidFill>
                   <a:srgbClr val="374151"/>
                 </a:solidFill>
@@ -8595,7 +8595,7 @@
               </a:spcAft>
             </a:pPr>
             <a:r>
-              <a:rPr sz="1500" b="0" i="0">
+              <a:rPr sz="1900" b="0" i="0">
                 <a:solidFill>
                   <a:srgbClr val="374151"/>
                 </a:solidFill>
@@ -8612,7 +8612,7 @@
               </a:spcAft>
             </a:pPr>
             <a:r>
-              <a:rPr sz="1500" b="0" i="0">
+              <a:rPr sz="1900" b="0" i="0">
                 <a:solidFill>
                   <a:srgbClr val="374151"/>
                 </a:solidFill>
@@ -8629,7 +8629,7 @@
               </a:spcAft>
             </a:pPr>
             <a:r>
-              <a:rPr sz="1500" b="0" i="0">
+              <a:rPr sz="1900" b="0" i="0">
                 <a:solidFill>
                   <a:srgbClr val="374151"/>
                 </a:solidFill>
@@ -8646,7 +8646,7 @@
               </a:spcAft>
             </a:pPr>
             <a:r>
-              <a:rPr sz="1500" b="0" i="0">
+              <a:rPr sz="1900" b="0" i="0">
                 <a:solidFill>
                   <a:srgbClr val="374151"/>
                 </a:solidFill>
@@ -8879,7 +8879,7 @@
         <p:spPr>
           <a:xfrm>
             <a:off x="457200" y="1143000"/>
-            <a:ext cx="11277295" cy="967740"/>
+            <a:ext cx="11277295" cy="1376680"/>
           </a:xfrm>
           <a:prstGeom prst="roundRect">
             <a:avLst>
@@ -8912,9 +8912,9 @@
           <a:bodyPr rtlCol="0" anchor="t" wrap="square" lIns="228600" rIns="137160" tIns="91440" bIns="91440"/>
           <a:lstStyle/>
           <a:p>
-            <a:pPr algn="ctr"/>
-            <a:r>
-              <a:rPr sz="1300" b="0" i="0">
+            <a:pPr algn="l"/>
+            <a:r>
+              <a:rPr sz="1550" b="0" i="0">
                 <a:solidFill>
                   <a:srgbClr val="1F2937"/>
                 </a:solidFill>
@@ -8935,7 +8935,7 @@
         <p:spPr>
           <a:xfrm>
             <a:off x="457200" y="1143000"/>
-            <a:ext cx="73152" cy="967740"/>
+            <a:ext cx="73152" cy="1376680"/>
           </a:xfrm>
           <a:prstGeom prst="rect">
             <a:avLst/>
@@ -8978,8 +8978,8 @@
         </p:nvSpPr>
         <p:spPr>
           <a:xfrm>
-            <a:off x="457200" y="2202180"/>
-            <a:ext cx="11277295" cy="1298448"/>
+            <a:off x="457200" y="2611120"/>
+            <a:ext cx="11277295" cy="1915668"/>
           </a:xfrm>
           <a:prstGeom prst="rect">
             <a:avLst/>
@@ -8998,7 +8998,7 @@
               </a:spcAft>
             </a:pPr>
             <a:r>
-              <a:rPr sz="1600" b="0" i="0">
+              <a:rPr sz="2000" b="0" i="0">
                 <a:solidFill>
                   <a:srgbClr val="222222"/>
                 </a:solidFill>
@@ -9015,7 +9015,7 @@
               </a:spcAft>
             </a:pPr>
             <a:r>
-              <a:rPr sz="1600" b="0" i="0">
+              <a:rPr sz="2000" b="0" i="0">
                 <a:solidFill>
                   <a:srgbClr val="222222"/>
                 </a:solidFill>
@@ -9389,7 +9389,7 @@
         <p:spPr>
           <a:xfrm>
             <a:off x="457200" y="1143000"/>
-            <a:ext cx="11277295" cy="2231136"/>
+            <a:ext cx="11277295" cy="3054096"/>
           </a:xfrm>
           <a:prstGeom prst="rect">
             <a:avLst/>
@@ -9408,7 +9408,7 @@
               </a:spcAft>
             </a:pPr>
             <a:r>
-              <a:rPr sz="1600" b="0" i="0">
+              <a:rPr sz="2000" b="0" i="0">
                 <a:solidFill>
                   <a:srgbClr val="222222"/>
                 </a:solidFill>
@@ -9425,7 +9425,7 @@
               </a:spcAft>
             </a:pPr>
             <a:r>
-              <a:rPr sz="1600" b="0" i="0">
+              <a:rPr sz="2000" b="0" i="0">
                 <a:solidFill>
                   <a:srgbClr val="222222"/>
                 </a:solidFill>
@@ -9442,7 +9442,7 @@
               </a:spcAft>
             </a:pPr>
             <a:r>
-              <a:rPr sz="1600" b="0" i="0">
+              <a:rPr sz="2000" b="0" i="0">
                 <a:solidFill>
                   <a:srgbClr val="222222"/>
                 </a:solidFill>
@@ -9459,7 +9459,7 @@
               </a:spcAft>
             </a:pPr>
             <a:r>
-              <a:rPr sz="1600" b="0" i="0">
+              <a:rPr sz="2000" b="0" i="0">
                 <a:solidFill>
                   <a:srgbClr val="222222"/>
                 </a:solidFill>
@@ -9693,7 +9693,7 @@
         </p:nvGraphicFramePr>
         <p:xfrm>
           <a:off x="457200" y="1143000"/>
-          <a:ext cx="11277293" cy="2844927"/>
+          <a:ext cx="11277293" cy="4256531"/>
         </p:xfrm>
         <a:graphic>
           <a:graphicData uri="http://schemas.openxmlformats.org/drawingml/2006/table">
@@ -9702,18 +9702,18 @@
                 <a:tableStyleId>{5C22544A-7EE6-4342-B048-85BDC9FD1C3A}</a:tableStyleId>
               </a:tblPr>
               <a:tblGrid>
-                <a:gridCol w="601455"/>
-                <a:gridCol w="7518196"/>
-                <a:gridCol w="3157642"/>
+                <a:gridCol w="1512807"/>
+                <a:gridCol w="6876399"/>
+                <a:gridCol w="2888087"/>
               </a:tblGrid>
-              <a:tr h="406418">
-                <a:tc>
-                  <a:txBody>
-                    <a:bodyPr wrap="square"/>
-                    <a:lstStyle/>
-                    <a:p>
-                      <a:r>
-                        <a:rPr sz="1250" b="1" i="0">
+              <a:tr h="608075">
+                <a:tc>
+                  <a:txBody>
+                    <a:bodyPr wrap="square"/>
+                    <a:lstStyle/>
+                    <a:p>
+                      <a:r>
+                        <a:rPr sz="1500" b="1" i="0">
                           <a:solidFill>
                             <a:srgbClr val="FFFFFF"/>
                           </a:solidFill>
@@ -9736,7 +9736,7 @@
                     <a:lstStyle/>
                     <a:p>
                       <a:r>
-                        <a:rPr sz="1250" b="1" i="0">
+                        <a:rPr sz="1500" b="1" i="0">
                           <a:solidFill>
                             <a:srgbClr val="FFFFFF"/>
                           </a:solidFill>
@@ -9759,7 +9759,7 @@
                     <a:lstStyle/>
                     <a:p>
                       <a:r>
-                        <a:rPr sz="1250" b="1" i="0">
+                        <a:rPr sz="1500" b="1" i="0">
                           <a:solidFill>
                             <a:srgbClr val="FFFFFF"/>
                           </a:solidFill>
@@ -9777,14 +9777,14 @@
                   </a:tcPr>
                 </a:tc>
               </a:tr>
-              <a:tr h="406418">
-                <a:tc>
-                  <a:txBody>
-                    <a:bodyPr wrap="square"/>
-                    <a:lstStyle/>
-                    <a:p>
-                      <a:r>
-                        <a:rPr sz="1250" b="1" i="0">
+              <a:tr h="608075">
+                <a:tc>
+                  <a:txBody>
+                    <a:bodyPr wrap="square"/>
+                    <a:lstStyle/>
+                    <a:p>
+                      <a:r>
+                        <a:rPr sz="1500" b="1" i="0">
                           <a:solidFill>
                             <a:srgbClr val="222222"/>
                           </a:solidFill>
@@ -9807,7 +9807,7 @@
                     <a:lstStyle/>
                     <a:p>
                       <a:r>
-                        <a:rPr sz="1250" b="0" i="0">
+                        <a:rPr sz="1500" b="0" i="0">
                           <a:solidFill>
                             <a:srgbClr val="222222"/>
                           </a:solidFill>
@@ -9830,7 +9830,7 @@
                     <a:lstStyle/>
                     <a:p>
                       <a:r>
-                        <a:rPr sz="1250" b="0" i="0">
+                        <a:rPr sz="1500" b="0" i="0">
                           <a:solidFill>
                             <a:srgbClr val="222222"/>
                           </a:solidFill>
@@ -9848,14 +9848,14 @@
                   </a:tcPr>
                 </a:tc>
               </a:tr>
-              <a:tr h="406418">
-                <a:tc>
-                  <a:txBody>
-                    <a:bodyPr wrap="square"/>
-                    <a:lstStyle/>
-                    <a:p>
-                      <a:r>
-                        <a:rPr sz="1250" b="1" i="0">
+              <a:tr h="608075">
+                <a:tc>
+                  <a:txBody>
+                    <a:bodyPr wrap="square"/>
+                    <a:lstStyle/>
+                    <a:p>
+                      <a:r>
+                        <a:rPr sz="1500" b="1" i="0">
                           <a:solidFill>
                             <a:srgbClr val="222222"/>
                           </a:solidFill>
@@ -9878,7 +9878,7 @@
                     <a:lstStyle/>
                     <a:p>
                       <a:r>
-                        <a:rPr sz="1250" b="0" i="0">
+                        <a:rPr sz="1500" b="0" i="0">
                           <a:solidFill>
                             <a:srgbClr val="222222"/>
                           </a:solidFill>
@@ -9901,7 +9901,7 @@
                     <a:lstStyle/>
                     <a:p>
                       <a:r>
-                        <a:rPr sz="1250" b="0" i="0">
+                        <a:rPr sz="1500" b="0" i="0">
                           <a:solidFill>
                             <a:srgbClr val="222222"/>
                           </a:solidFill>
@@ -9919,14 +9919,14 @@
                   </a:tcPr>
                 </a:tc>
               </a:tr>
-              <a:tr h="406418">
-                <a:tc>
-                  <a:txBody>
-                    <a:bodyPr wrap="square"/>
-                    <a:lstStyle/>
-                    <a:p>
-                      <a:r>
-                        <a:rPr sz="1250" b="1" i="0">
+              <a:tr h="608075">
+                <a:tc>
+                  <a:txBody>
+                    <a:bodyPr wrap="square"/>
+                    <a:lstStyle/>
+                    <a:p>
+                      <a:r>
+                        <a:rPr sz="1500" b="1" i="0">
                           <a:solidFill>
                             <a:srgbClr val="222222"/>
                           </a:solidFill>
@@ -9949,7 +9949,7 @@
                     <a:lstStyle/>
                     <a:p>
                       <a:r>
-                        <a:rPr sz="1250" b="0" i="0">
+                        <a:rPr sz="1500" b="0" i="0">
                           <a:solidFill>
                             <a:srgbClr val="222222"/>
                           </a:solidFill>
@@ -9972,7 +9972,7 @@
                     <a:lstStyle/>
                     <a:p>
                       <a:r>
-                        <a:rPr sz="1250" b="0" i="0">
+                        <a:rPr sz="1500" b="0" i="0">
                           <a:solidFill>
                             <a:srgbClr val="222222"/>
                           </a:solidFill>
@@ -9990,14 +9990,14 @@
                   </a:tcPr>
                 </a:tc>
               </a:tr>
-              <a:tr h="406418">
-                <a:tc>
-                  <a:txBody>
-                    <a:bodyPr wrap="square"/>
-                    <a:lstStyle/>
-                    <a:p>
-                      <a:r>
-                        <a:rPr sz="1250" b="1" i="0">
+              <a:tr h="608075">
+                <a:tc>
+                  <a:txBody>
+                    <a:bodyPr wrap="square"/>
+                    <a:lstStyle/>
+                    <a:p>
+                      <a:r>
+                        <a:rPr sz="1500" b="1" i="0">
                           <a:solidFill>
                             <a:srgbClr val="222222"/>
                           </a:solidFill>
@@ -10020,7 +10020,7 @@
                     <a:lstStyle/>
                     <a:p>
                       <a:r>
-                        <a:rPr sz="1250" b="0" i="0">
+                        <a:rPr sz="1500" b="0" i="0">
                           <a:solidFill>
                             <a:srgbClr val="222222"/>
                           </a:solidFill>
@@ -10043,7 +10043,7 @@
                     <a:lstStyle/>
                     <a:p>
                       <a:r>
-                        <a:rPr sz="1250" b="0" i="0">
+                        <a:rPr sz="1500" b="0" i="0">
                           <a:solidFill>
                             <a:srgbClr val="222222"/>
                           </a:solidFill>
@@ -10061,14 +10061,14 @@
                   </a:tcPr>
                 </a:tc>
               </a:tr>
-              <a:tr h="406418">
-                <a:tc>
-                  <a:txBody>
-                    <a:bodyPr wrap="square"/>
-                    <a:lstStyle/>
-                    <a:p>
-                      <a:r>
-                        <a:rPr sz="1250" b="1" i="0">
+              <a:tr h="608075">
+                <a:tc>
+                  <a:txBody>
+                    <a:bodyPr wrap="square"/>
+                    <a:lstStyle/>
+                    <a:p>
+                      <a:r>
+                        <a:rPr sz="1500" b="1" i="0">
                           <a:solidFill>
                             <a:srgbClr val="222222"/>
                           </a:solidFill>
@@ -10091,7 +10091,7 @@
                     <a:lstStyle/>
                     <a:p>
                       <a:r>
-                        <a:rPr sz="1250" b="0" i="0">
+                        <a:rPr sz="1500" b="0" i="0">
                           <a:solidFill>
                             <a:srgbClr val="222222"/>
                           </a:solidFill>
@@ -10114,7 +10114,7 @@
                     <a:lstStyle/>
                     <a:p>
                       <a:r>
-                        <a:rPr sz="1250" b="0" i="0">
+                        <a:rPr sz="1500" b="0" i="0">
                           <a:solidFill>
                             <a:srgbClr val="222222"/>
                           </a:solidFill>
@@ -10132,14 +10132,14 @@
                   </a:tcPr>
                 </a:tc>
               </a:tr>
-              <a:tr h="406419">
-                <a:tc>
-                  <a:txBody>
-                    <a:bodyPr wrap="square"/>
-                    <a:lstStyle/>
-                    <a:p>
-                      <a:r>
-                        <a:rPr sz="1250" b="1" i="0">
+              <a:tr h="608081">
+                <a:tc>
+                  <a:txBody>
+                    <a:bodyPr wrap="square"/>
+                    <a:lstStyle/>
+                    <a:p>
+                      <a:r>
+                        <a:rPr sz="1500" b="1" i="0">
                           <a:solidFill>
                             <a:srgbClr val="222222"/>
                           </a:solidFill>
@@ -10162,7 +10162,7 @@
                     <a:lstStyle/>
                     <a:p>
                       <a:r>
-                        <a:rPr sz="1250" b="0" i="0">
+                        <a:rPr sz="1500" b="0" i="0">
                           <a:solidFill>
                             <a:srgbClr val="222222"/>
                           </a:solidFill>
@@ -10185,7 +10185,7 @@
                     <a:lstStyle/>
                     <a:p>
                       <a:r>
-                        <a:rPr sz="1250" b="0" i="0">
+                        <a:rPr sz="1500" b="0" i="0">
                           <a:solidFill>
                             <a:srgbClr val="222222"/>
                           </a:solidFill>
@@ -10428,7 +10428,7 @@
         <p:spPr>
           <a:xfrm>
             <a:off x="457200" y="1143000"/>
-            <a:ext cx="11277295" cy="694944"/>
+            <a:ext cx="11277295" cy="832104"/>
           </a:xfrm>
           <a:prstGeom prst="rect">
             <a:avLst/>
@@ -10447,7 +10447,7 @@
               </a:spcAft>
             </a:pPr>
             <a:r>
-              <a:rPr sz="1600" b="0" i="0">
+              <a:rPr sz="2000" b="0" i="0">
                 <a:solidFill>
                   <a:srgbClr val="222222"/>
                 </a:solidFill>
@@ -10467,8 +10467,8 @@
         </p:nvSpPr>
         <p:spPr>
           <a:xfrm>
-            <a:off x="457200" y="1837944"/>
-            <a:ext cx="11277295" cy="967740"/>
+            <a:off x="457200" y="1975104"/>
+            <a:ext cx="11277295" cy="1376680"/>
           </a:xfrm>
           <a:prstGeom prst="roundRect">
             <a:avLst>
@@ -10501,9 +10501,9 @@
           <a:bodyPr rtlCol="0" anchor="t" wrap="square" lIns="228600" rIns="137160" tIns="91440" bIns="91440"/>
           <a:lstStyle/>
           <a:p>
-            <a:pPr algn="ctr"/>
-            <a:r>
-              <a:rPr sz="1300" b="0" i="0">
+            <a:pPr algn="l"/>
+            <a:r>
+              <a:rPr sz="1550" b="0" i="0">
                 <a:solidFill>
                   <a:srgbClr val="1F2937"/>
                 </a:solidFill>
@@ -10523,8 +10523,8 @@
         </p:nvSpPr>
         <p:spPr>
           <a:xfrm>
-            <a:off x="457200" y="1837944"/>
-            <a:ext cx="73152" cy="967740"/>
+            <a:off x="457200" y="1975104"/>
+            <a:ext cx="73152" cy="1376680"/>
           </a:xfrm>
           <a:prstGeom prst="rect">
             <a:avLst/>
@@ -10567,8 +10567,8 @@
         </p:nvSpPr>
         <p:spPr>
           <a:xfrm>
-            <a:off x="457200" y="2897124"/>
-            <a:ext cx="11277295" cy="273050"/>
+            <a:off x="457200" y="3443224"/>
+            <a:ext cx="11277295" cy="297815"/>
           </a:xfrm>
           <a:prstGeom prst="rect">
             <a:avLst/>
@@ -10582,7 +10582,7 @@
           <a:lstStyle/>
           <a:p>
             <a:r>
-              <a:rPr sz="1100" b="0" i="1">
+              <a:rPr sz="1250" b="0" i="1">
                 <a:solidFill>
                   <a:srgbClr val="6B7280"/>
                 </a:solidFill>
@@ -10956,7 +10956,7 @@
         <p:spPr>
           <a:xfrm>
             <a:off x="457200" y="1143000"/>
-            <a:ext cx="11277295" cy="1627632"/>
+            <a:ext cx="11277295" cy="2313432"/>
           </a:xfrm>
           <a:prstGeom prst="rect">
             <a:avLst/>
@@ -10975,7 +10975,7 @@
               </a:spcAft>
             </a:pPr>
             <a:r>
-              <a:rPr sz="1600" b="0" i="0">
+              <a:rPr sz="2000" b="0" i="0">
                 <a:solidFill>
                   <a:srgbClr val="222222"/>
                 </a:solidFill>
@@ -10992,7 +10992,7 @@
               </a:spcAft>
             </a:pPr>
             <a:r>
-              <a:rPr sz="1600" b="0" i="0">
+              <a:rPr sz="2000" b="0" i="0">
                 <a:solidFill>
                   <a:srgbClr val="222222"/>
                 </a:solidFill>
@@ -11009,7 +11009,7 @@
               </a:spcAft>
             </a:pPr>
             <a:r>
-              <a:rPr sz="1600" b="0" i="0">
+              <a:rPr sz="2000" b="0" i="0">
                 <a:solidFill>
                   <a:srgbClr val="222222"/>
                 </a:solidFill>
@@ -11029,8 +11029,8 @@
         </p:nvSpPr>
         <p:spPr>
           <a:xfrm>
-            <a:off x="457200" y="2770632"/>
-            <a:ext cx="11277295" cy="1198880"/>
+            <a:off x="457200" y="3456432"/>
+            <a:ext cx="11277295" cy="1376680"/>
           </a:xfrm>
           <a:prstGeom prst="roundRect">
             <a:avLst>
@@ -11063,9 +11063,9 @@
           <a:bodyPr rtlCol="0" anchor="t" wrap="square" lIns="228600" rIns="137160" tIns="91440" bIns="91440"/>
           <a:lstStyle/>
           <a:p>
-            <a:pPr algn="ctr"/>
-            <a:r>
-              <a:rPr sz="1300" b="0" i="0">
+            <a:pPr algn="l"/>
+            <a:r>
+              <a:rPr sz="1550" b="0" i="0">
                 <a:solidFill>
                   <a:srgbClr val="1F2937"/>
                 </a:solidFill>
@@ -11085,8 +11085,8 @@
         </p:nvSpPr>
         <p:spPr>
           <a:xfrm>
-            <a:off x="457200" y="2770632"/>
-            <a:ext cx="73152" cy="1198880"/>
+            <a:off x="457200" y="3456432"/>
+            <a:ext cx="73152" cy="1376680"/>
           </a:xfrm>
           <a:prstGeom prst="rect">
             <a:avLst/>
@@ -11129,8 +11129,8 @@
         </p:nvSpPr>
         <p:spPr>
           <a:xfrm>
-            <a:off x="457200" y="4060952"/>
-            <a:ext cx="11277295" cy="694944"/>
+            <a:off x="457200" y="4924552"/>
+            <a:ext cx="11277295" cy="832104"/>
           </a:xfrm>
           <a:prstGeom prst="rect">
             <a:avLst/>
@@ -11149,7 +11149,7 @@
               </a:spcAft>
             </a:pPr>
             <a:r>
-              <a:rPr sz="1600" b="0" i="0">
+              <a:rPr sz="2000" b="0" i="0">
                 <a:solidFill>
                   <a:srgbClr val="222222"/>
                 </a:solidFill>
@@ -11382,7 +11382,7 @@
         <p:spPr>
           <a:xfrm>
             <a:off x="457200" y="1143000"/>
-            <a:ext cx="11277295" cy="3931920"/>
+            <a:ext cx="11277295" cy="5097779"/>
           </a:xfrm>
           <a:prstGeom prst="rect">
             <a:avLst/>
@@ -11401,7 +11401,7 @@
               </a:spcAft>
             </a:pPr>
             <a:r>
-              <a:rPr sz="1600" b="0" i="0">
+              <a:rPr sz="2000" b="0" i="0">
                 <a:solidFill>
                   <a:srgbClr val="222222"/>
                 </a:solidFill>
@@ -11418,7 +11418,7 @@
               </a:spcAft>
             </a:pPr>
             <a:r>
-              <a:rPr sz="1600" b="0" i="0">
+              <a:rPr sz="2000" b="0" i="0">
                 <a:solidFill>
                   <a:srgbClr val="222222"/>
                 </a:solidFill>
@@ -11435,7 +11435,7 @@
               </a:spcAft>
             </a:pPr>
             <a:r>
-              <a:rPr sz="1600" b="0" i="0">
+              <a:rPr sz="2000" b="0" i="0">
                 <a:solidFill>
                   <a:srgbClr val="222222"/>
                 </a:solidFill>
@@ -11452,7 +11452,7 @@
               </a:spcAft>
             </a:pPr>
             <a:r>
-              <a:rPr sz="1500" b="0" i="0">
+              <a:rPr sz="1900" b="0" i="0">
                 <a:solidFill>
                   <a:srgbClr val="374151"/>
                 </a:solidFill>
@@ -11469,7 +11469,7 @@
               </a:spcAft>
             </a:pPr>
             <a:r>
-              <a:rPr sz="1500" b="0" i="0">
+              <a:rPr sz="1900" b="0" i="0">
                 <a:solidFill>
                   <a:srgbClr val="374151"/>
                 </a:solidFill>
@@ -11486,7 +11486,7 @@
               </a:spcAft>
             </a:pPr>
             <a:r>
-              <a:rPr sz="1500" b="0" i="0">
+              <a:rPr sz="1900" b="0" i="0">
                 <a:solidFill>
                   <a:srgbClr val="374151"/>
                 </a:solidFill>
@@ -11503,7 +11503,7 @@
               </a:spcAft>
             </a:pPr>
             <a:r>
-              <a:rPr sz="1500" b="0" i="0">
+              <a:rPr sz="1900" b="0" i="0">
                 <a:solidFill>
                   <a:srgbClr val="374151"/>
                 </a:solidFill>
@@ -11520,7 +11520,7 @@
               </a:spcAft>
             </a:pPr>
             <a:r>
-              <a:rPr sz="1500" b="0" i="0">
+              <a:rPr sz="1900" b="0" i="0">
                 <a:solidFill>
                   <a:srgbClr val="374151"/>
                 </a:solidFill>
@@ -11537,7 +11537,7 @@
               </a:spcAft>
             </a:pPr>
             <a:r>
-              <a:rPr sz="1500" b="0" i="0">
+              <a:rPr sz="1900" b="0" i="0">
                 <a:solidFill>
                   <a:srgbClr val="374151"/>
                 </a:solidFill>
@@ -11554,7 +11554,7 @@
               </a:spcAft>
             </a:pPr>
             <a:r>
-              <a:rPr sz="1600" b="0" i="0">
+              <a:rPr sz="2000" b="0" i="0">
                 <a:solidFill>
                   <a:srgbClr val="222222"/>
                 </a:solidFill>
@@ -12069,7 +12069,7 @@
         <p:spPr>
           <a:xfrm>
             <a:off x="457200" y="1143000"/>
-            <a:ext cx="11277295" cy="4096512"/>
+            <a:ext cx="11277295" cy="4946904"/>
           </a:xfrm>
           <a:prstGeom prst="rect">
             <a:avLst/>
@@ -12088,7 +12088,7 @@
               </a:spcAft>
             </a:pPr>
             <a:r>
-              <a:rPr sz="1600" b="0" i="0">
+              <a:rPr sz="1839" b="0" i="0">
                 <a:solidFill>
                   <a:srgbClr val="222222"/>
                 </a:solidFill>
@@ -12105,7 +12105,7 @@
               </a:spcAft>
             </a:pPr>
             <a:r>
-              <a:rPr sz="1600" b="0" i="0">
+              <a:rPr sz="1839" b="0" i="0">
                 <a:solidFill>
                   <a:srgbClr val="222222"/>
                 </a:solidFill>
@@ -12122,7 +12122,7 @@
               </a:spcAft>
             </a:pPr>
             <a:r>
-              <a:rPr sz="1600" b="0" i="0">
+              <a:rPr sz="1839" b="0" i="0">
                 <a:solidFill>
                   <a:srgbClr val="222222"/>
                 </a:solidFill>
@@ -12139,7 +12139,7 @@
               </a:spcAft>
             </a:pPr>
             <a:r>
-              <a:rPr sz="1500" b="0" i="0">
+              <a:rPr sz="1739" b="0" i="0">
                 <a:solidFill>
                   <a:srgbClr val="374151"/>
                 </a:solidFill>
@@ -12156,7 +12156,7 @@
               </a:spcAft>
             </a:pPr>
             <a:r>
-              <a:rPr sz="1500" b="0" i="0">
+              <a:rPr sz="1739" b="0" i="0">
                 <a:solidFill>
                   <a:srgbClr val="374151"/>
                 </a:solidFill>
@@ -12173,7 +12173,7 @@
               </a:spcAft>
             </a:pPr>
             <a:r>
-              <a:rPr sz="1500" b="0" i="0">
+              <a:rPr sz="1739" b="0" i="0">
                 <a:solidFill>
                   <a:srgbClr val="374151"/>
                 </a:solidFill>
@@ -12190,7 +12190,7 @@
               </a:spcAft>
             </a:pPr>
             <a:r>
-              <a:rPr sz="1500" b="0" i="0">
+              <a:rPr sz="1739" b="0" i="0">
                 <a:solidFill>
                   <a:srgbClr val="374151"/>
                 </a:solidFill>
@@ -12207,7 +12207,7 @@
               </a:spcAft>
             </a:pPr>
             <a:r>
-              <a:rPr sz="1600" b="0" i="0">
+              <a:rPr sz="1839" b="0" i="0">
                 <a:solidFill>
                   <a:srgbClr val="222222"/>
                 </a:solidFill>
@@ -12441,7 +12441,7 @@
         </p:nvGraphicFramePr>
         <p:xfrm>
           <a:off x="457200" y="1143000"/>
-          <a:ext cx="11277293" cy="2382520"/>
+          <a:ext cx="11277294" cy="2994660"/>
         </p:xfrm>
         <a:graphic>
           <a:graphicData uri="http://schemas.openxmlformats.org/drawingml/2006/table">
@@ -12450,18 +12450,18 @@
                 <a:tableStyleId>{5C22544A-7EE6-4342-B048-85BDC9FD1C3A}</a:tableStyleId>
               </a:tblPr>
               <a:tblGrid>
-                <a:gridCol w="722903"/>
-                <a:gridCol w="3469936"/>
-                <a:gridCol w="7084454"/>
+                <a:gridCol w="1476788"/>
+                <a:gridCol w="3222084"/>
+                <a:gridCol w="6578422"/>
               </a:tblGrid>
-              <a:tr h="476504">
-                <a:tc>
-                  <a:txBody>
-                    <a:bodyPr wrap="square"/>
-                    <a:lstStyle/>
-                    <a:p>
-                      <a:r>
-                        <a:rPr sz="1250" b="1" i="0">
+              <a:tr h="598932">
+                <a:tc>
+                  <a:txBody>
+                    <a:bodyPr wrap="square"/>
+                    <a:lstStyle/>
+                    <a:p>
+                      <a:r>
+                        <a:rPr sz="1500" b="1" i="0">
                           <a:solidFill>
                             <a:srgbClr val="FFFFFF"/>
                           </a:solidFill>
@@ -12484,7 +12484,7 @@
                     <a:lstStyle/>
                     <a:p>
                       <a:r>
-                        <a:rPr sz="1250" b="1" i="0">
+                        <a:rPr sz="1500" b="1" i="0">
                           <a:solidFill>
                             <a:srgbClr val="FFFFFF"/>
                           </a:solidFill>
@@ -12507,7 +12507,7 @@
                     <a:lstStyle/>
                     <a:p>
                       <a:r>
-                        <a:rPr sz="1250" b="1" i="0">
+                        <a:rPr sz="1500" b="1" i="0">
                           <a:solidFill>
                             <a:srgbClr val="FFFFFF"/>
                           </a:solidFill>
@@ -12525,14 +12525,14 @@
                   </a:tcPr>
                 </a:tc>
               </a:tr>
-              <a:tr h="476504">
-                <a:tc>
-                  <a:txBody>
-                    <a:bodyPr wrap="square"/>
-                    <a:lstStyle/>
-                    <a:p>
-                      <a:r>
-                        <a:rPr sz="1250" b="1" i="0">
+              <a:tr h="598932">
+                <a:tc>
+                  <a:txBody>
+                    <a:bodyPr wrap="square"/>
+                    <a:lstStyle/>
+                    <a:p>
+                      <a:r>
+                        <a:rPr sz="1500" b="1" i="0">
                           <a:solidFill>
                             <a:srgbClr val="222222"/>
                           </a:solidFill>
@@ -12555,7 +12555,7 @@
                     <a:lstStyle/>
                     <a:p>
                       <a:r>
-                        <a:rPr sz="1250" b="0" i="0">
+                        <a:rPr sz="1500" b="0" i="0">
                           <a:solidFill>
                             <a:srgbClr val="222222"/>
                           </a:solidFill>
@@ -12578,7 +12578,7 @@
                     <a:lstStyle/>
                     <a:p>
                       <a:r>
-                        <a:rPr sz="1250" b="0" i="0">
+                        <a:rPr sz="1500" b="0" i="0">
                           <a:solidFill>
                             <a:srgbClr val="222222"/>
                           </a:solidFill>
@@ -12596,14 +12596,14 @@
                   </a:tcPr>
                 </a:tc>
               </a:tr>
-              <a:tr h="476504">
-                <a:tc>
-                  <a:txBody>
-                    <a:bodyPr wrap="square"/>
-                    <a:lstStyle/>
-                    <a:p>
-                      <a:r>
-                        <a:rPr sz="1250" b="1" i="0">
+              <a:tr h="598932">
+                <a:tc>
+                  <a:txBody>
+                    <a:bodyPr wrap="square"/>
+                    <a:lstStyle/>
+                    <a:p>
+                      <a:r>
+                        <a:rPr sz="1500" b="1" i="0">
                           <a:solidFill>
                             <a:srgbClr val="222222"/>
                           </a:solidFill>
@@ -12626,7 +12626,7 @@
                     <a:lstStyle/>
                     <a:p>
                       <a:r>
-                        <a:rPr sz="1250" b="0" i="0">
+                        <a:rPr sz="1500" b="0" i="0">
                           <a:solidFill>
                             <a:srgbClr val="222222"/>
                           </a:solidFill>
@@ -12649,7 +12649,7 @@
                     <a:lstStyle/>
                     <a:p>
                       <a:r>
-                        <a:rPr sz="1250" b="0" i="0">
+                        <a:rPr sz="1500" b="0" i="0">
                           <a:solidFill>
                             <a:srgbClr val="222222"/>
                           </a:solidFill>
@@ -12667,14 +12667,14 @@
                   </a:tcPr>
                 </a:tc>
               </a:tr>
-              <a:tr h="476504">
-                <a:tc>
-                  <a:txBody>
-                    <a:bodyPr wrap="square"/>
-                    <a:lstStyle/>
-                    <a:p>
-                      <a:r>
-                        <a:rPr sz="1250" b="1" i="0">
+              <a:tr h="598932">
+                <a:tc>
+                  <a:txBody>
+                    <a:bodyPr wrap="square"/>
+                    <a:lstStyle/>
+                    <a:p>
+                      <a:r>
+                        <a:rPr sz="1500" b="1" i="0">
                           <a:solidFill>
                             <a:srgbClr val="222222"/>
                           </a:solidFill>
@@ -12697,7 +12697,7 @@
                     <a:lstStyle/>
                     <a:p>
                       <a:r>
-                        <a:rPr sz="1250" b="0" i="0">
+                        <a:rPr sz="1500" b="0" i="0">
                           <a:solidFill>
                             <a:srgbClr val="222222"/>
                           </a:solidFill>
@@ -12720,7 +12720,7 @@
                     <a:lstStyle/>
                     <a:p>
                       <a:r>
-                        <a:rPr sz="1250" b="0" i="0">
+                        <a:rPr sz="1500" b="0" i="0">
                           <a:solidFill>
                             <a:srgbClr val="222222"/>
                           </a:solidFill>
@@ -12738,14 +12738,14 @@
                   </a:tcPr>
                 </a:tc>
               </a:tr>
-              <a:tr h="476504">
-                <a:tc>
-                  <a:txBody>
-                    <a:bodyPr wrap="square"/>
-                    <a:lstStyle/>
-                    <a:p>
-                      <a:r>
-                        <a:rPr sz="1250" b="1" i="0">
+              <a:tr h="598932">
+                <a:tc>
+                  <a:txBody>
+                    <a:bodyPr wrap="square"/>
+                    <a:lstStyle/>
+                    <a:p>
+                      <a:r>
+                        <a:rPr sz="1500" b="1" i="0">
                           <a:solidFill>
                             <a:srgbClr val="222222"/>
                           </a:solidFill>
@@ -12768,7 +12768,7 @@
                     <a:lstStyle/>
                     <a:p>
                       <a:r>
-                        <a:rPr sz="1250" b="0" i="0">
+                        <a:rPr sz="1500" b="0" i="0">
                           <a:solidFill>
                             <a:srgbClr val="222222"/>
                           </a:solidFill>
@@ -12791,7 +12791,7 @@
                     <a:lstStyle/>
                     <a:p>
                       <a:r>
-                        <a:rPr sz="1250" b="0" i="0">
+                        <a:rPr sz="1500" b="0" i="0">
                           <a:solidFill>
                             <a:srgbClr val="222222"/>
                           </a:solidFill>
@@ -12821,8 +12821,8 @@
         </p:nvSpPr>
         <p:spPr>
           <a:xfrm>
-            <a:off x="457200" y="3525520"/>
-            <a:ext cx="11277295" cy="1298448"/>
+            <a:off x="457200" y="4137660"/>
+            <a:ext cx="11277295" cy="1915668"/>
           </a:xfrm>
           <a:prstGeom prst="rect">
             <a:avLst/>
@@ -12841,7 +12841,7 @@
               </a:spcAft>
             </a:pPr>
             <a:r>
-              <a:rPr sz="1600" b="0" i="0">
+              <a:rPr sz="2000" b="0" i="0">
                 <a:solidFill>
                   <a:srgbClr val="222222"/>
                 </a:solidFill>
@@ -12858,7 +12858,7 @@
               </a:spcAft>
             </a:pPr>
             <a:r>
-              <a:rPr sz="1600" b="0" i="0">
+              <a:rPr sz="2000" b="0" i="0">
                 <a:solidFill>
                   <a:srgbClr val="222222"/>
                 </a:solidFill>
@@ -13232,7 +13232,7 @@
         <p:spPr>
           <a:xfrm>
             <a:off x="457200" y="1143000"/>
-            <a:ext cx="11277295" cy="3273552"/>
+            <a:ext cx="11277295" cy="4302251"/>
           </a:xfrm>
           <a:prstGeom prst="rect">
             <a:avLst/>
@@ -13251,7 +13251,7 @@
               </a:spcAft>
             </a:pPr>
             <a:r>
-              <a:rPr sz="1600" b="0" i="0">
+              <a:rPr sz="2000" b="0" i="0">
                 <a:solidFill>
                   <a:srgbClr val="222222"/>
                 </a:solidFill>
@@ -13268,7 +13268,7 @@
               </a:spcAft>
             </a:pPr>
             <a:r>
-              <a:rPr sz="1600" b="0" i="0">
+              <a:rPr sz="2000" b="0" i="0">
                 <a:solidFill>
                   <a:srgbClr val="222222"/>
                 </a:solidFill>
@@ -13285,7 +13285,7 @@
               </a:spcAft>
             </a:pPr>
             <a:r>
-              <a:rPr sz="1600" b="0" i="0">
+              <a:rPr sz="2000" b="0" i="0">
                 <a:solidFill>
                   <a:srgbClr val="222222"/>
                 </a:solidFill>
@@ -13302,7 +13302,7 @@
               </a:spcAft>
             </a:pPr>
             <a:r>
-              <a:rPr sz="1500" b="0" i="0">
+              <a:rPr sz="1900" b="0" i="0">
                 <a:solidFill>
                   <a:srgbClr val="374151"/>
                 </a:solidFill>
@@ -13319,7 +13319,7 @@
               </a:spcAft>
             </a:pPr>
             <a:r>
-              <a:rPr sz="1500" b="0" i="0">
+              <a:rPr sz="1900" b="0" i="0">
                 <a:solidFill>
                   <a:srgbClr val="374151"/>
                 </a:solidFill>
@@ -13336,7 +13336,7 @@
               </a:spcAft>
             </a:pPr>
             <a:r>
-              <a:rPr sz="1500" b="0" i="0">
+              <a:rPr sz="1900" b="0" i="0">
                 <a:solidFill>
                   <a:srgbClr val="374151"/>
                 </a:solidFill>
@@ -13353,7 +13353,7 @@
               </a:spcAft>
             </a:pPr>
             <a:r>
-              <a:rPr sz="1500" b="0" i="0">
+              <a:rPr sz="1900" b="0" i="0">
                 <a:solidFill>
                   <a:srgbClr val="374151"/>
                 </a:solidFill>
@@ -13370,7 +13370,7 @@
               </a:spcAft>
             </a:pPr>
             <a:r>
-              <a:rPr sz="1500" b="0" i="0">
+              <a:rPr sz="1900" b="0" i="0">
                 <a:solidFill>
                   <a:srgbClr val="374151"/>
                 </a:solidFill>
@@ -13604,7 +13604,7 @@
         </p:nvGraphicFramePr>
         <p:xfrm>
           <a:off x="457200" y="1143000"/>
-          <a:ext cx="11277293" cy="3542411"/>
+          <a:ext cx="11277291" cy="4715255"/>
         </p:xfrm>
         <a:graphic>
           <a:graphicData uri="http://schemas.openxmlformats.org/drawingml/2006/table">
@@ -13613,20 +13613,20 @@
                 <a:tableStyleId>{5C22544A-7EE6-4342-B048-85BDC9FD1C3A}</a:tableStyleId>
               </a:tblPr>
               <a:tblGrid>
-                <a:gridCol w="436540"/>
-                <a:gridCol w="4292647"/>
-                <a:gridCol w="2400972"/>
-                <a:gridCol w="3637837"/>
-                <a:gridCol w="509297"/>
+                <a:gridCol w="756403"/>
+                <a:gridCol w="4057075"/>
+                <a:gridCol w="2269211"/>
+                <a:gridCol w="3438199"/>
+                <a:gridCol w="756403"/>
               </a:tblGrid>
-              <a:tr h="590401">
-                <a:tc>
-                  <a:txBody>
-                    <a:bodyPr wrap="square"/>
-                    <a:lstStyle/>
-                    <a:p>
-                      <a:r>
-                        <a:rPr sz="1250" b="1" i="0">
+              <a:tr h="785875">
+                <a:tc>
+                  <a:txBody>
+                    <a:bodyPr wrap="square"/>
+                    <a:lstStyle/>
+                    <a:p>
+                      <a:r>
+                        <a:rPr sz="1437" b="1" i="0">
                           <a:solidFill>
                             <a:srgbClr val="FFFFFF"/>
                           </a:solidFill>
@@ -13649,7 +13649,7 @@
                     <a:lstStyle/>
                     <a:p>
                       <a:r>
-                        <a:rPr sz="1250" b="1" i="0">
+                        <a:rPr sz="1437" b="1" i="0">
                           <a:solidFill>
                             <a:srgbClr val="FFFFFF"/>
                           </a:solidFill>
@@ -13672,7 +13672,7 @@
                     <a:lstStyle/>
                     <a:p>
                       <a:r>
-                        <a:rPr sz="1250" b="1" i="0">
+                        <a:rPr sz="1437" b="1" i="0">
                           <a:solidFill>
                             <a:srgbClr val="FFFFFF"/>
                           </a:solidFill>
@@ -13695,7 +13695,7 @@
                     <a:lstStyle/>
                     <a:p>
                       <a:r>
-                        <a:rPr sz="1250" b="1" i="0">
+                        <a:rPr sz="1437" b="1" i="0">
                           <a:solidFill>
                             <a:srgbClr val="FFFFFF"/>
                           </a:solidFill>
@@ -13718,7 +13718,7 @@
                     <a:lstStyle/>
                     <a:p>
                       <a:r>
-                        <a:rPr sz="1250" b="1" i="0">
+                        <a:rPr sz="1437" b="1" i="0">
                           <a:solidFill>
                             <a:srgbClr val="FFFFFF"/>
                           </a:solidFill>
@@ -13736,14 +13736,14 @@
                   </a:tcPr>
                 </a:tc>
               </a:tr>
-              <a:tr h="590401">
-                <a:tc>
-                  <a:txBody>
-                    <a:bodyPr wrap="square"/>
-                    <a:lstStyle/>
-                    <a:p>
-                      <a:r>
-                        <a:rPr sz="1250" b="1" i="0">
+              <a:tr h="785875">
+                <a:tc>
+                  <a:txBody>
+                    <a:bodyPr wrap="square"/>
+                    <a:lstStyle/>
+                    <a:p>
+                      <a:r>
+                        <a:rPr sz="1437" b="1" i="0">
                           <a:solidFill>
                             <a:srgbClr val="222222"/>
                           </a:solidFill>
@@ -13766,7 +13766,7 @@
                     <a:lstStyle/>
                     <a:p>
                       <a:r>
-                        <a:rPr sz="1250" b="0" i="0">
+                        <a:rPr sz="1437" b="0" i="0">
                           <a:solidFill>
                             <a:srgbClr val="222222"/>
                           </a:solidFill>
@@ -13789,7 +13789,7 @@
                     <a:lstStyle/>
                     <a:p>
                       <a:r>
-                        <a:rPr sz="1250" b="0" i="0">
+                        <a:rPr sz="1437" b="0" i="0">
                           <a:solidFill>
                             <a:srgbClr val="222222"/>
                           </a:solidFill>
@@ -13812,7 +13812,7 @@
                     <a:lstStyle/>
                     <a:p>
                       <a:r>
-                        <a:rPr sz="1250" b="0" i="0">
+                        <a:rPr sz="1437" b="0" i="0">
                           <a:solidFill>
                             <a:srgbClr val="222222"/>
                           </a:solidFill>
@@ -13835,7 +13835,7 @@
                     <a:lstStyle/>
                     <a:p>
                       <a:r>
-                        <a:rPr sz="1250" b="0" i="0">
+                        <a:rPr sz="1437" b="0" i="0">
                           <a:solidFill>
                             <a:srgbClr val="222222"/>
                           </a:solidFill>
@@ -13853,14 +13853,14 @@
                   </a:tcPr>
                 </a:tc>
               </a:tr>
-              <a:tr h="590401">
-                <a:tc>
-                  <a:txBody>
-                    <a:bodyPr wrap="square"/>
-                    <a:lstStyle/>
-                    <a:p>
-                      <a:r>
-                        <a:rPr sz="1250" b="1" i="0">
+              <a:tr h="785875">
+                <a:tc>
+                  <a:txBody>
+                    <a:bodyPr wrap="square"/>
+                    <a:lstStyle/>
+                    <a:p>
+                      <a:r>
+                        <a:rPr sz="1437" b="1" i="0">
                           <a:solidFill>
                             <a:srgbClr val="222222"/>
                           </a:solidFill>
@@ -13883,7 +13883,7 @@
                     <a:lstStyle/>
                     <a:p>
                       <a:r>
-                        <a:rPr sz="1250" b="0" i="0">
+                        <a:rPr sz="1437" b="0" i="0">
                           <a:solidFill>
                             <a:srgbClr val="222222"/>
                           </a:solidFill>
@@ -13906,7 +13906,7 @@
                     <a:lstStyle/>
                     <a:p>
                       <a:r>
-                        <a:rPr sz="1250" b="0" i="0">
+                        <a:rPr sz="1437" b="0" i="0">
                           <a:solidFill>
                             <a:srgbClr val="222222"/>
                           </a:solidFill>
@@ -13929,7 +13929,7 @@
                     <a:lstStyle/>
                     <a:p>
                       <a:r>
-                        <a:rPr sz="1250" b="0" i="0">
+                        <a:rPr sz="1437" b="0" i="0">
                           <a:solidFill>
                             <a:srgbClr val="222222"/>
                           </a:solidFill>
@@ -13952,7 +13952,7 @@
                     <a:lstStyle/>
                     <a:p>
                       <a:r>
-                        <a:rPr sz="1250" b="0" i="0">
+                        <a:rPr sz="1437" b="0" i="0">
                           <a:solidFill>
                             <a:srgbClr val="222222"/>
                           </a:solidFill>
@@ -13970,14 +13970,14 @@
                   </a:tcPr>
                 </a:tc>
               </a:tr>
-              <a:tr h="590401">
-                <a:tc>
-                  <a:txBody>
-                    <a:bodyPr wrap="square"/>
-                    <a:lstStyle/>
-                    <a:p>
-                      <a:r>
-                        <a:rPr sz="1250" b="1" i="0">
+              <a:tr h="785875">
+                <a:tc>
+                  <a:txBody>
+                    <a:bodyPr wrap="square"/>
+                    <a:lstStyle/>
+                    <a:p>
+                      <a:r>
+                        <a:rPr sz="1437" b="1" i="0">
                           <a:solidFill>
                             <a:srgbClr val="222222"/>
                           </a:solidFill>
@@ -14000,7 +14000,7 @@
                     <a:lstStyle/>
                     <a:p>
                       <a:r>
-                        <a:rPr sz="1250" b="0" i="0">
+                        <a:rPr sz="1437" b="0" i="0">
                           <a:solidFill>
                             <a:srgbClr val="222222"/>
                           </a:solidFill>
@@ -14023,7 +14023,7 @@
                     <a:lstStyle/>
                     <a:p>
                       <a:r>
-                        <a:rPr sz="1250" b="0" i="0">
+                        <a:rPr sz="1437" b="0" i="0">
                           <a:solidFill>
                             <a:srgbClr val="222222"/>
                           </a:solidFill>
@@ -14046,7 +14046,7 @@
                     <a:lstStyle/>
                     <a:p>
                       <a:r>
-                        <a:rPr sz="1250" b="0" i="0">
+                        <a:rPr sz="1437" b="0" i="0">
                           <a:solidFill>
                             <a:srgbClr val="222222"/>
                           </a:solidFill>
@@ -14069,7 +14069,7 @@
                     <a:lstStyle/>
                     <a:p>
                       <a:r>
-                        <a:rPr sz="1250" b="0" i="0">
+                        <a:rPr sz="1437" b="0" i="0">
                           <a:solidFill>
                             <a:srgbClr val="222222"/>
                           </a:solidFill>
@@ -14087,14 +14087,14 @@
                   </a:tcPr>
                 </a:tc>
               </a:tr>
-              <a:tr h="590401">
-                <a:tc>
-                  <a:txBody>
-                    <a:bodyPr wrap="square"/>
-                    <a:lstStyle/>
-                    <a:p>
-                      <a:r>
-                        <a:rPr sz="1250" b="1" i="0">
+              <a:tr h="785875">
+                <a:tc>
+                  <a:txBody>
+                    <a:bodyPr wrap="square"/>
+                    <a:lstStyle/>
+                    <a:p>
+                      <a:r>
+                        <a:rPr sz="1437" b="1" i="0">
                           <a:solidFill>
                             <a:srgbClr val="222222"/>
                           </a:solidFill>
@@ -14117,7 +14117,7 @@
                     <a:lstStyle/>
                     <a:p>
                       <a:r>
-                        <a:rPr sz="1250" b="0" i="0">
+                        <a:rPr sz="1437" b="0" i="0">
                           <a:solidFill>
                             <a:srgbClr val="222222"/>
                           </a:solidFill>
@@ -14140,7 +14140,7 @@
                     <a:lstStyle/>
                     <a:p>
                       <a:r>
-                        <a:rPr sz="1250" b="0" i="0">
+                        <a:rPr sz="1437" b="0" i="0">
                           <a:solidFill>
                             <a:srgbClr val="222222"/>
                           </a:solidFill>
@@ -14163,7 +14163,7 @@
                     <a:lstStyle/>
                     <a:p>
                       <a:r>
-                        <a:rPr sz="1250" b="0" i="0">
+                        <a:rPr sz="1437" b="0" i="0">
                           <a:solidFill>
                             <a:srgbClr val="222222"/>
                           </a:solidFill>
@@ -14186,7 +14186,7 @@
                     <a:lstStyle/>
                     <a:p>
                       <a:r>
-                        <a:rPr sz="1250" b="0" i="0">
+                        <a:rPr sz="1437" b="0" i="0">
                           <a:solidFill>
                             <a:srgbClr val="222222"/>
                           </a:solidFill>
@@ -14204,14 +14204,14 @@
                   </a:tcPr>
                 </a:tc>
               </a:tr>
-              <a:tr h="590406">
-                <a:tc>
-                  <a:txBody>
-                    <a:bodyPr wrap="square"/>
-                    <a:lstStyle/>
-                    <a:p>
-                      <a:r>
-                        <a:rPr sz="1250" b="1" i="0">
+              <a:tr h="785880">
+                <a:tc>
+                  <a:txBody>
+                    <a:bodyPr wrap="square"/>
+                    <a:lstStyle/>
+                    <a:p>
+                      <a:r>
+                        <a:rPr sz="1437" b="1" i="0">
                           <a:solidFill>
                             <a:srgbClr val="222222"/>
                           </a:solidFill>
@@ -14234,7 +14234,7 @@
                     <a:lstStyle/>
                     <a:p>
                       <a:r>
-                        <a:rPr sz="1250" b="0" i="0">
+                        <a:rPr sz="1437" b="0" i="0">
                           <a:solidFill>
                             <a:srgbClr val="222222"/>
                           </a:solidFill>
@@ -14257,7 +14257,7 @@
                     <a:lstStyle/>
                     <a:p>
                       <a:r>
-                        <a:rPr sz="1250" b="0" i="0">
+                        <a:rPr sz="1437" b="0" i="0">
                           <a:solidFill>
                             <a:srgbClr val="222222"/>
                           </a:solidFill>
@@ -14280,7 +14280,7 @@
                     <a:lstStyle/>
                     <a:p>
                       <a:r>
-                        <a:rPr sz="1250" b="0" i="0">
+                        <a:rPr sz="1437" b="0" i="0">
                           <a:solidFill>
                             <a:srgbClr val="222222"/>
                           </a:solidFill>
@@ -14303,7 +14303,7 @@
                     <a:lstStyle/>
                     <a:p>
                       <a:r>
-                        <a:rPr sz="1250" b="0" i="0">
+                        <a:rPr sz="1437" b="0" i="0">
                           <a:solidFill>
                             <a:srgbClr val="222222"/>
                           </a:solidFill>
@@ -14546,7 +14546,7 @@
         <p:spPr>
           <a:xfrm>
             <a:off x="457200" y="1143000"/>
-            <a:ext cx="11277295" cy="3712464"/>
+            <a:ext cx="11277295" cy="5221224"/>
           </a:xfrm>
           <a:prstGeom prst="rect">
             <a:avLst/>
@@ -14565,7 +14565,7 @@
               </a:spcAft>
             </a:pPr>
             <a:r>
-              <a:rPr sz="1600" b="0" i="0">
+              <a:rPr sz="2000" b="0" i="0">
                 <a:solidFill>
                   <a:srgbClr val="222222"/>
                 </a:solidFill>
@@ -14582,7 +14582,7 @@
               </a:spcAft>
             </a:pPr>
             <a:r>
-              <a:rPr sz="1600" b="0" i="0">
+              <a:rPr sz="2000" b="0" i="0">
                 <a:solidFill>
                   <a:srgbClr val="222222"/>
                 </a:solidFill>
@@ -14599,7 +14599,7 @@
               </a:spcAft>
             </a:pPr>
             <a:r>
-              <a:rPr sz="1600" b="0" i="0">
+              <a:rPr sz="2000" b="0" i="0">
                 <a:solidFill>
                   <a:srgbClr val="222222"/>
                 </a:solidFill>
@@ -14616,7 +14616,7 @@
               </a:spcAft>
             </a:pPr>
             <a:r>
-              <a:rPr sz="1600" b="0" i="0">
+              <a:rPr sz="2000" b="0" i="0">
                 <a:solidFill>
                   <a:srgbClr val="222222"/>
                 </a:solidFill>
@@ -14633,7 +14633,7 @@
               </a:spcAft>
             </a:pPr>
             <a:r>
-              <a:rPr sz="1600" b="0" i="0">
+              <a:rPr sz="2000" b="0" i="0">
                 <a:solidFill>
                   <a:srgbClr val="222222"/>
                 </a:solidFill>
@@ -14650,7 +14650,7 @@
               </a:spcAft>
             </a:pPr>
             <a:r>
-              <a:rPr sz="1600" b="0" i="0">
+              <a:rPr sz="2000" b="0" i="0">
                 <a:solidFill>
                   <a:srgbClr val="222222"/>
                 </a:solidFill>
@@ -14883,7 +14883,7 @@
         <p:spPr>
           <a:xfrm>
             <a:off x="457200" y="1143000"/>
-            <a:ext cx="11277295" cy="967740"/>
+            <a:ext cx="11277295" cy="1376680"/>
           </a:xfrm>
           <a:prstGeom prst="roundRect">
             <a:avLst>
@@ -14916,9 +14916,9 @@
           <a:bodyPr rtlCol="0" anchor="t" wrap="square" lIns="228600" rIns="137160" tIns="91440" bIns="91440"/>
           <a:lstStyle/>
           <a:p>
-            <a:pPr algn="ctr"/>
-            <a:r>
-              <a:rPr sz="1300" b="0" i="0">
+            <a:pPr algn="l"/>
+            <a:r>
+              <a:rPr sz="1550" b="0" i="0">
                 <a:solidFill>
                   <a:srgbClr val="1F2937"/>
                 </a:solidFill>
@@ -14929,8 +14929,9 @@
             </a:r>
           </a:p>
           <a:p>
-            <a:r>
-              <a:rPr sz="1300" b="0" i="0">
+            <a:pPr algn="l"/>
+            <a:r>
+              <a:rPr sz="1550" b="0" i="0">
                 <a:solidFill>
                   <a:srgbClr val="1F2937"/>
                 </a:solidFill>
@@ -14951,7 +14952,7 @@
         <p:spPr>
           <a:xfrm>
             <a:off x="457200" y="1143000"/>
-            <a:ext cx="73152" cy="967740"/>
+            <a:ext cx="73152" cy="1376680"/>
           </a:xfrm>
           <a:prstGeom prst="rect">
             <a:avLst/>
@@ -14994,8 +14995,8 @@
         </p:nvSpPr>
         <p:spPr>
           <a:xfrm>
-            <a:off x="457200" y="2202180"/>
-            <a:ext cx="11277295" cy="1198880"/>
+            <a:off x="457200" y="2611120"/>
+            <a:ext cx="11277295" cy="1652270"/>
           </a:xfrm>
           <a:prstGeom prst="roundRect">
             <a:avLst>
@@ -15028,9 +15029,9 @@
           <a:bodyPr rtlCol="0" anchor="t" wrap="square" lIns="228600" rIns="137160" tIns="91440" bIns="91440"/>
           <a:lstStyle/>
           <a:p>
-            <a:pPr algn="ctr"/>
-            <a:r>
-              <a:rPr sz="1300" b="0" i="0">
+            <a:pPr algn="l"/>
+            <a:r>
+              <a:rPr sz="1550" b="0" i="0">
                 <a:solidFill>
                   <a:srgbClr val="1F2937"/>
                 </a:solidFill>
@@ -15041,8 +15042,9 @@
             </a:r>
           </a:p>
           <a:p>
-            <a:r>
-              <a:rPr sz="1300" b="0" i="0">
+            <a:pPr algn="l"/>
+            <a:r>
+              <a:rPr sz="1550" b="0" i="0">
                 <a:solidFill>
                   <a:srgbClr val="1F2937"/>
                 </a:solidFill>
@@ -15062,8 +15064,8 @@
         </p:nvSpPr>
         <p:spPr>
           <a:xfrm>
-            <a:off x="457200" y="2202180"/>
-            <a:ext cx="73152" cy="1198880"/>
+            <a:off x="457200" y="2611120"/>
+            <a:ext cx="73152" cy="1652270"/>
           </a:xfrm>
           <a:prstGeom prst="rect">
             <a:avLst/>
@@ -15106,8 +15108,8 @@
         </p:nvSpPr>
         <p:spPr>
           <a:xfrm>
-            <a:off x="457200" y="3492500"/>
-            <a:ext cx="11277295" cy="1198880"/>
+            <a:off x="457200" y="4354830"/>
+            <a:ext cx="11277295" cy="1376680"/>
           </a:xfrm>
           <a:prstGeom prst="roundRect">
             <a:avLst>
@@ -15140,9 +15142,9 @@
           <a:bodyPr rtlCol="0" anchor="t" wrap="square" lIns="228600" rIns="137160" tIns="91440" bIns="91440"/>
           <a:lstStyle/>
           <a:p>
-            <a:pPr algn="ctr"/>
-            <a:r>
-              <a:rPr sz="1300" b="0" i="0">
+            <a:pPr algn="l"/>
+            <a:r>
+              <a:rPr sz="1550" b="0" i="0">
                 <a:solidFill>
                   <a:srgbClr val="1F2937"/>
                 </a:solidFill>
@@ -15153,8 +15155,9 @@
             </a:r>
           </a:p>
           <a:p>
-            <a:r>
-              <a:rPr sz="1300" b="0" i="0">
+            <a:pPr algn="l"/>
+            <a:r>
+              <a:rPr sz="1550" b="0" i="0">
                 <a:solidFill>
                   <a:srgbClr val="1F2937"/>
                 </a:solidFill>
@@ -15174,8 +15177,8 @@
         </p:nvSpPr>
         <p:spPr>
           <a:xfrm>
-            <a:off x="457200" y="3492500"/>
-            <a:ext cx="73152" cy="1198880"/>
+            <a:off x="457200" y="4354830"/>
+            <a:ext cx="73152" cy="1376680"/>
           </a:xfrm>
           <a:prstGeom prst="rect">
             <a:avLst/>
@@ -15218,8 +15221,8 @@
         </p:nvSpPr>
         <p:spPr>
           <a:xfrm>
-            <a:off x="457200" y="4782820"/>
-            <a:ext cx="11277295" cy="454660"/>
+            <a:off x="457200" y="5822950"/>
+            <a:ext cx="11277295" cy="504190"/>
           </a:xfrm>
           <a:prstGeom prst="rect">
             <a:avLst/>
@@ -15233,7 +15236,7 @@
           <a:lstStyle/>
           <a:p>
             <a:r>
-              <a:rPr sz="1100" b="0" i="1">
+              <a:rPr sz="1250" b="0" i="1">
                 <a:solidFill>
                   <a:srgbClr val="6B7280"/>
                 </a:solidFill>
@@ -15608,7 +15611,7 @@
         </p:nvGraphicFramePr>
         <p:xfrm>
           <a:off x="457200" y="1143000"/>
-          <a:ext cx="11277293" cy="2432176"/>
+          <a:ext cx="11277294" cy="3334511"/>
         </p:xfrm>
         <a:graphic>
           <a:graphicData uri="http://schemas.openxmlformats.org/drawingml/2006/table">
@@ -15617,18 +15620,18 @@
                 <a:tableStyleId>{5C22544A-7EE6-4342-B048-85BDC9FD1C3A}</a:tableStyleId>
               </a:tblPr>
               <a:tblGrid>
-                <a:gridCol w="1361052"/>
-                <a:gridCol w="3694286"/>
-                <a:gridCol w="6221955"/>
+                <a:gridCol w="2000810"/>
+                <a:gridCol w="3455945"/>
+                <a:gridCol w="5820539"/>
               </a:tblGrid>
-              <a:tr h="347453">
-                <a:tc>
-                  <a:txBody>
-                    <a:bodyPr wrap="square"/>
-                    <a:lstStyle/>
-                    <a:p>
-                      <a:r>
-                        <a:rPr sz="1250" b="1" i="0">
+              <a:tr h="476358">
+                <a:tc>
+                  <a:txBody>
+                    <a:bodyPr wrap="square"/>
+                    <a:lstStyle/>
+                    <a:p>
+                      <a:r>
+                        <a:rPr sz="1399" b="1" i="0">
                           <a:solidFill>
                             <a:srgbClr val="FFFFFF"/>
                           </a:solidFill>
@@ -15651,7 +15654,7 @@
                     <a:lstStyle/>
                     <a:p>
                       <a:r>
-                        <a:rPr sz="1250" b="1" i="0">
+                        <a:rPr sz="1399" b="1" i="0">
                           <a:solidFill>
                             <a:srgbClr val="FFFFFF"/>
                           </a:solidFill>
@@ -15674,7 +15677,7 @@
                     <a:lstStyle/>
                     <a:p>
                       <a:r>
-                        <a:rPr sz="1250" b="1" i="0">
+                        <a:rPr sz="1399" b="1" i="0">
                           <a:solidFill>
                             <a:srgbClr val="FFFFFF"/>
                           </a:solidFill>
@@ -15692,14 +15695,14 @@
                   </a:tcPr>
                 </a:tc>
               </a:tr>
-              <a:tr h="347453">
-                <a:tc>
-                  <a:txBody>
-                    <a:bodyPr wrap="square"/>
-                    <a:lstStyle/>
-                    <a:p>
-                      <a:r>
-                        <a:rPr sz="1250" b="1" i="0">
+              <a:tr h="476358">
+                <a:tc>
+                  <a:txBody>
+                    <a:bodyPr wrap="square"/>
+                    <a:lstStyle/>
+                    <a:p>
+                      <a:r>
+                        <a:rPr sz="1399" b="1" i="0">
                           <a:solidFill>
                             <a:srgbClr val="222222"/>
                           </a:solidFill>
@@ -15722,7 +15725,7 @@
                     <a:lstStyle/>
                     <a:p>
                       <a:r>
-                        <a:rPr sz="1250" b="0" i="0">
+                        <a:rPr sz="1399" b="0" i="0">
                           <a:solidFill>
                             <a:srgbClr val="222222"/>
                           </a:solidFill>
@@ -15745,7 +15748,7 @@
                     <a:lstStyle/>
                     <a:p>
                       <a:r>
-                        <a:rPr sz="1250" b="0" i="0">
+                        <a:rPr sz="1399" b="0" i="0">
                           <a:solidFill>
                             <a:srgbClr val="222222"/>
                           </a:solidFill>
@@ -15763,14 +15766,14 @@
                   </a:tcPr>
                 </a:tc>
               </a:tr>
-              <a:tr h="347453">
-                <a:tc>
-                  <a:txBody>
-                    <a:bodyPr wrap="square"/>
-                    <a:lstStyle/>
-                    <a:p>
-                      <a:r>
-                        <a:rPr sz="1250" b="1" i="0">
+              <a:tr h="476358">
+                <a:tc>
+                  <a:txBody>
+                    <a:bodyPr wrap="square"/>
+                    <a:lstStyle/>
+                    <a:p>
+                      <a:r>
+                        <a:rPr sz="1399" b="1" i="0">
                           <a:solidFill>
                             <a:srgbClr val="222222"/>
                           </a:solidFill>
@@ -15793,7 +15796,7 @@
                     <a:lstStyle/>
                     <a:p>
                       <a:r>
-                        <a:rPr sz="1250" b="0" i="0">
+                        <a:rPr sz="1399" b="0" i="0">
                           <a:solidFill>
                             <a:srgbClr val="222222"/>
                           </a:solidFill>
@@ -15816,7 +15819,7 @@
                     <a:lstStyle/>
                     <a:p>
                       <a:r>
-                        <a:rPr sz="1250" b="0" i="0">
+                        <a:rPr sz="1399" b="0" i="0">
                           <a:solidFill>
                             <a:srgbClr val="222222"/>
                           </a:solidFill>
@@ -15834,14 +15837,14 @@
                   </a:tcPr>
                 </a:tc>
               </a:tr>
-              <a:tr h="347453">
-                <a:tc>
-                  <a:txBody>
-                    <a:bodyPr wrap="square"/>
-                    <a:lstStyle/>
-                    <a:p>
-                      <a:r>
-                        <a:rPr sz="1250" b="1" i="0">
+              <a:tr h="476358">
+                <a:tc>
+                  <a:txBody>
+                    <a:bodyPr wrap="square"/>
+                    <a:lstStyle/>
+                    <a:p>
+                      <a:r>
+                        <a:rPr sz="1399" b="1" i="0">
                           <a:solidFill>
                             <a:srgbClr val="222222"/>
                           </a:solidFill>
@@ -15864,7 +15867,7 @@
                     <a:lstStyle/>
                     <a:p>
                       <a:r>
-                        <a:rPr sz="1250" b="0" i="0">
+                        <a:rPr sz="1399" b="0" i="0">
                           <a:solidFill>
                             <a:srgbClr val="222222"/>
                           </a:solidFill>
@@ -15887,7 +15890,7 @@
                     <a:lstStyle/>
                     <a:p>
                       <a:r>
-                        <a:rPr sz="1250" b="0" i="0">
+                        <a:rPr sz="1399" b="0" i="0">
                           <a:solidFill>
                             <a:srgbClr val="222222"/>
                           </a:solidFill>
@@ -15905,14 +15908,14 @@
                   </a:tcPr>
                 </a:tc>
               </a:tr>
-              <a:tr h="347453">
-                <a:tc>
-                  <a:txBody>
-                    <a:bodyPr wrap="square"/>
-                    <a:lstStyle/>
-                    <a:p>
-                      <a:r>
-                        <a:rPr sz="1250" b="1" i="0">
+              <a:tr h="476358">
+                <a:tc>
+                  <a:txBody>
+                    <a:bodyPr wrap="square"/>
+                    <a:lstStyle/>
+                    <a:p>
+                      <a:r>
+                        <a:rPr sz="1399" b="1" i="0">
                           <a:solidFill>
                             <a:srgbClr val="222222"/>
                           </a:solidFill>
@@ -15935,7 +15938,7 @@
                     <a:lstStyle/>
                     <a:p>
                       <a:r>
-                        <a:rPr sz="1250" b="0" i="0">
+                        <a:rPr sz="1399" b="0" i="0">
                           <a:solidFill>
                             <a:srgbClr val="222222"/>
                           </a:solidFill>
@@ -15958,7 +15961,7 @@
                     <a:lstStyle/>
                     <a:p>
                       <a:r>
-                        <a:rPr sz="1250" b="0" i="0">
+                        <a:rPr sz="1399" b="0" i="0">
                           <a:solidFill>
                             <a:srgbClr val="222222"/>
                           </a:solidFill>
@@ -15976,14 +15979,14 @@
                   </a:tcPr>
                 </a:tc>
               </a:tr>
-              <a:tr h="347453">
-                <a:tc>
-                  <a:txBody>
-                    <a:bodyPr wrap="square"/>
-                    <a:lstStyle/>
-                    <a:p>
-                      <a:r>
-                        <a:rPr sz="1250" b="1" i="0">
+              <a:tr h="476358">
+                <a:tc>
+                  <a:txBody>
+                    <a:bodyPr wrap="square"/>
+                    <a:lstStyle/>
+                    <a:p>
+                      <a:r>
+                        <a:rPr sz="1399" b="1" i="0">
                           <a:solidFill>
                             <a:srgbClr val="222222"/>
                           </a:solidFill>
@@ -16006,7 +16009,7 @@
                     <a:lstStyle/>
                     <a:p>
                       <a:r>
-                        <a:rPr sz="1250" b="0" i="0">
+                        <a:rPr sz="1399" b="0" i="0">
                           <a:solidFill>
                             <a:srgbClr val="222222"/>
                           </a:solidFill>
@@ -16029,7 +16032,7 @@
                     <a:lstStyle/>
                     <a:p>
                       <a:r>
-                        <a:rPr sz="1250" b="0" i="0">
+                        <a:rPr sz="1399" b="0" i="0">
                           <a:solidFill>
                             <a:srgbClr val="222222"/>
                           </a:solidFill>
@@ -16047,14 +16050,14 @@
                   </a:tcPr>
                 </a:tc>
               </a:tr>
-              <a:tr h="347458">
-                <a:tc>
-                  <a:txBody>
-                    <a:bodyPr wrap="square"/>
-                    <a:lstStyle/>
-                    <a:p>
-                      <a:r>
-                        <a:rPr sz="1250" b="1" i="0">
+              <a:tr h="476363">
+                <a:tc>
+                  <a:txBody>
+                    <a:bodyPr wrap="square"/>
+                    <a:lstStyle/>
+                    <a:p>
+                      <a:r>
+                        <a:rPr sz="1399" b="1" i="0">
                           <a:solidFill>
                             <a:srgbClr val="222222"/>
                           </a:solidFill>
@@ -16077,7 +16080,7 @@
                     <a:lstStyle/>
                     <a:p>
                       <a:r>
-                        <a:rPr sz="1250" b="0" i="0">
+                        <a:rPr sz="1399" b="0" i="0">
                           <a:solidFill>
                             <a:srgbClr val="222222"/>
                           </a:solidFill>
@@ -16100,7 +16103,7 @@
                     <a:lstStyle/>
                     <a:p>
                       <a:r>
-                        <a:rPr sz="1250" b="0" i="0">
+                        <a:rPr sz="1399" b="0" i="0">
                           <a:solidFill>
                             <a:srgbClr val="222222"/>
                           </a:solidFill>
@@ -16130,8 +16133,8 @@
         </p:nvSpPr>
         <p:spPr>
           <a:xfrm>
-            <a:off x="457200" y="3575176"/>
-            <a:ext cx="11277295" cy="1298448"/>
+            <a:off x="457200" y="4477511"/>
+            <a:ext cx="11277295" cy="1737360"/>
           </a:xfrm>
           <a:prstGeom prst="rect">
             <a:avLst/>
@@ -16150,7 +16153,7 @@
               </a:spcAft>
             </a:pPr>
             <a:r>
-              <a:rPr sz="1600" b="0" i="0">
+              <a:rPr sz="1791" b="0" i="0">
                 <a:solidFill>
                   <a:srgbClr val="222222"/>
                 </a:solidFill>
@@ -16167,7 +16170,7 @@
               </a:spcAft>
             </a:pPr>
             <a:r>
-              <a:rPr sz="1600" b="0" i="0">
+              <a:rPr sz="1791" b="0" i="0">
                 <a:solidFill>
                   <a:srgbClr val="222222"/>
                 </a:solidFill>
@@ -16401,7 +16404,7 @@
         </p:nvGraphicFramePr>
         <p:xfrm>
           <a:off x="457200" y="1143000"/>
-          <a:ext cx="11277294" cy="2097786"/>
+          <a:ext cx="11277294" cy="2619756"/>
         </p:xfrm>
         <a:graphic>
           <a:graphicData uri="http://schemas.openxmlformats.org/drawingml/2006/table">
@@ -16410,18 +16413,18 @@
                 <a:tableStyleId>{5C22544A-7EE6-4342-B048-85BDC9FD1C3A}</a:tableStyleId>
               </a:tblPr>
               <a:tblGrid>
-                <a:gridCol w="1611042"/>
-                <a:gridCol w="1611042"/>
-                <a:gridCol w="8055210"/>
+                <a:gridCol w="2000810"/>
+                <a:gridCol w="2000810"/>
+                <a:gridCol w="7275674"/>
               </a:tblGrid>
-              <a:tr h="349631">
-                <a:tc>
-                  <a:txBody>
-                    <a:bodyPr wrap="square"/>
-                    <a:lstStyle/>
-                    <a:p>
-                      <a:r>
-                        <a:rPr sz="1250" b="1" i="0">
+              <a:tr h="436626">
+                <a:tc>
+                  <a:txBody>
+                    <a:bodyPr wrap="square"/>
+                    <a:lstStyle/>
+                    <a:p>
+                      <a:r>
+                        <a:rPr sz="1500" b="1" i="0">
                           <a:solidFill>
                             <a:srgbClr val="FFFFFF"/>
                           </a:solidFill>
@@ -16444,7 +16447,7 @@
                     <a:lstStyle/>
                     <a:p>
                       <a:r>
-                        <a:rPr sz="1250" b="1" i="0">
+                        <a:rPr sz="1500" b="1" i="0">
                           <a:solidFill>
                             <a:srgbClr val="FFFFFF"/>
                           </a:solidFill>
@@ -16467,7 +16470,7 @@
                     <a:lstStyle/>
                     <a:p>
                       <a:r>
-                        <a:rPr sz="1250" b="1" i="0">
+                        <a:rPr sz="1500" b="1" i="0">
                           <a:solidFill>
                             <a:srgbClr val="FFFFFF"/>
                           </a:solidFill>
@@ -16485,14 +16488,14 @@
                   </a:tcPr>
                 </a:tc>
               </a:tr>
-              <a:tr h="349631">
-                <a:tc>
-                  <a:txBody>
-                    <a:bodyPr wrap="square"/>
-                    <a:lstStyle/>
-                    <a:p>
-                      <a:r>
-                        <a:rPr sz="1250" b="1" i="0">
+              <a:tr h="436626">
+                <a:tc>
+                  <a:txBody>
+                    <a:bodyPr wrap="square"/>
+                    <a:lstStyle/>
+                    <a:p>
+                      <a:r>
+                        <a:rPr sz="1500" b="1" i="0">
                           <a:solidFill>
                             <a:srgbClr val="222222"/>
                           </a:solidFill>
@@ -16515,7 +16518,7 @@
                     <a:lstStyle/>
                     <a:p>
                       <a:r>
-                        <a:rPr sz="1250" b="0" i="0">
+                        <a:rPr sz="1500" b="0" i="0">
                           <a:solidFill>
                             <a:srgbClr val="222222"/>
                           </a:solidFill>
@@ -16538,7 +16541,7 @@
                     <a:lstStyle/>
                     <a:p>
                       <a:r>
-                        <a:rPr sz="1250" b="0" i="0">
+                        <a:rPr sz="1500" b="0" i="0">
                           <a:solidFill>
                             <a:srgbClr val="222222"/>
                           </a:solidFill>
@@ -16556,14 +16559,14 @@
                   </a:tcPr>
                 </a:tc>
               </a:tr>
-              <a:tr h="349631">
-                <a:tc>
-                  <a:txBody>
-                    <a:bodyPr wrap="square"/>
-                    <a:lstStyle/>
-                    <a:p>
-                      <a:r>
-                        <a:rPr sz="1250" b="1" i="0">
+              <a:tr h="436626">
+                <a:tc>
+                  <a:txBody>
+                    <a:bodyPr wrap="square"/>
+                    <a:lstStyle/>
+                    <a:p>
+                      <a:r>
+                        <a:rPr sz="1500" b="1" i="0">
                           <a:solidFill>
                             <a:srgbClr val="222222"/>
                           </a:solidFill>
@@ -16586,7 +16589,7 @@
                     <a:lstStyle/>
                     <a:p>
                       <a:r>
-                        <a:rPr sz="1250" b="0" i="0">
+                        <a:rPr sz="1500" b="0" i="0">
                           <a:solidFill>
                             <a:srgbClr val="222222"/>
                           </a:solidFill>
@@ -16609,7 +16612,7 @@
                     <a:lstStyle/>
                     <a:p>
                       <a:r>
-                        <a:rPr sz="1250" b="0" i="0">
+                        <a:rPr sz="1500" b="0" i="0">
                           <a:solidFill>
                             <a:srgbClr val="222222"/>
                           </a:solidFill>
@@ -16627,14 +16630,14 @@
                   </a:tcPr>
                 </a:tc>
               </a:tr>
-              <a:tr h="349631">
-                <a:tc>
-                  <a:txBody>
-                    <a:bodyPr wrap="square"/>
-                    <a:lstStyle/>
-                    <a:p>
-                      <a:r>
-                        <a:rPr sz="1250" b="1" i="0">
+              <a:tr h="436626">
+                <a:tc>
+                  <a:txBody>
+                    <a:bodyPr wrap="square"/>
+                    <a:lstStyle/>
+                    <a:p>
+                      <a:r>
+                        <a:rPr sz="1500" b="1" i="0">
                           <a:solidFill>
                             <a:srgbClr val="222222"/>
                           </a:solidFill>
@@ -16657,7 +16660,7 @@
                     <a:lstStyle/>
                     <a:p>
                       <a:r>
-                        <a:rPr sz="1250" b="0" i="0">
+                        <a:rPr sz="1500" b="0" i="0">
                           <a:solidFill>
                             <a:srgbClr val="222222"/>
                           </a:solidFill>
@@ -16680,7 +16683,7 @@
                     <a:lstStyle/>
                     <a:p>
                       <a:r>
-                        <a:rPr sz="1250" b="0" i="0">
+                        <a:rPr sz="1500" b="0" i="0">
                           <a:solidFill>
                             <a:srgbClr val="222222"/>
                           </a:solidFill>
@@ -16698,14 +16701,14 @@
                   </a:tcPr>
                 </a:tc>
               </a:tr>
-              <a:tr h="349631">
-                <a:tc>
-                  <a:txBody>
-                    <a:bodyPr wrap="square"/>
-                    <a:lstStyle/>
-                    <a:p>
-                      <a:r>
-                        <a:rPr sz="1250" b="1" i="0">
+              <a:tr h="436626">
+                <a:tc>
+                  <a:txBody>
+                    <a:bodyPr wrap="square"/>
+                    <a:lstStyle/>
+                    <a:p>
+                      <a:r>
+                        <a:rPr sz="1500" b="1" i="0">
                           <a:solidFill>
                             <a:srgbClr val="222222"/>
                           </a:solidFill>
@@ -16728,7 +16731,7 @@
                     <a:lstStyle/>
                     <a:p>
                       <a:r>
-                        <a:rPr sz="1250" b="0" i="0">
+                        <a:rPr sz="1500" b="0" i="0">
                           <a:solidFill>
                             <a:srgbClr val="222222"/>
                           </a:solidFill>
@@ -16751,7 +16754,7 @@
                     <a:lstStyle/>
                     <a:p>
                       <a:r>
-                        <a:rPr sz="1250" b="0" i="0">
+                        <a:rPr sz="1500" b="0" i="0">
                           <a:solidFill>
                             <a:srgbClr val="222222"/>
                           </a:solidFill>
@@ -16769,14 +16772,14 @@
                   </a:tcPr>
                 </a:tc>
               </a:tr>
-              <a:tr h="349631">
-                <a:tc>
-                  <a:txBody>
-                    <a:bodyPr wrap="square"/>
-                    <a:lstStyle/>
-                    <a:p>
-                      <a:r>
-                        <a:rPr sz="1250" b="1" i="0">
+              <a:tr h="436626">
+                <a:tc>
+                  <a:txBody>
+                    <a:bodyPr wrap="square"/>
+                    <a:lstStyle/>
+                    <a:p>
+                      <a:r>
+                        <a:rPr sz="1500" b="1" i="0">
                           <a:solidFill>
                             <a:srgbClr val="222222"/>
                           </a:solidFill>
@@ -16799,7 +16802,7 @@
                     <a:lstStyle/>
                     <a:p>
                       <a:r>
-                        <a:rPr sz="1250" b="0" i="0">
+                        <a:rPr sz="1500" b="0" i="0">
                           <a:solidFill>
                             <a:srgbClr val="222222"/>
                           </a:solidFill>
@@ -16822,7 +16825,7 @@
                     <a:lstStyle/>
                     <a:p>
                       <a:r>
-                        <a:rPr sz="1250" b="0" i="0">
+                        <a:rPr sz="1500" b="0" i="0">
                           <a:solidFill>
                             <a:srgbClr val="222222"/>
                           </a:solidFill>
@@ -16852,8 +16855,8 @@
         </p:nvSpPr>
         <p:spPr>
           <a:xfrm>
-            <a:off x="457200" y="3240786"/>
-            <a:ext cx="11277295" cy="749808"/>
+            <a:off x="457200" y="3762756"/>
+            <a:ext cx="11277295" cy="1572768"/>
           </a:xfrm>
           <a:prstGeom prst="rect">
             <a:avLst/>
@@ -16872,7 +16875,7 @@
               </a:spcAft>
             </a:pPr>
             <a:r>
-              <a:rPr sz="1600" b="0" i="0">
+              <a:rPr sz="2000" b="0" i="0">
                 <a:solidFill>
                   <a:srgbClr val="222222"/>
                 </a:solidFill>
@@ -16889,7 +16892,7 @@
               </a:spcAft>
             </a:pPr>
             <a:r>
-              <a:rPr sz="1600" b="0" i="0">
+              <a:rPr sz="2000" b="0" i="0">
                 <a:solidFill>
                   <a:srgbClr val="222222"/>
                 </a:solidFill>
@@ -17264,7 +17267,7 @@
         </p:nvGraphicFramePr>
         <p:xfrm>
           <a:off x="457200" y="1143000"/>
-          <a:ext cx="11277295" cy="2844926"/>
+          <a:ext cx="11277294" cy="3753611"/>
         </p:xfrm>
         <a:graphic>
           <a:graphicData uri="http://schemas.openxmlformats.org/drawingml/2006/table">
@@ -17273,18 +17276,18 @@
                 <a:tableStyleId>{5C22544A-7EE6-4342-B048-85BDC9FD1C3A}</a:tableStyleId>
               </a:tblPr>
               <a:tblGrid>
-                <a:gridCol w="999254"/>
-                <a:gridCol w="6994778"/>
-                <a:gridCol w="3283263"/>
+                <a:gridCol w="1494581"/>
+                <a:gridCol w="6657680"/>
+                <a:gridCol w="3125033"/>
               </a:tblGrid>
-              <a:tr h="406418">
-                <a:tc>
-                  <a:txBody>
-                    <a:bodyPr wrap="square"/>
-                    <a:lstStyle/>
-                    <a:p>
-                      <a:r>
-                        <a:rPr sz="1250" b="1" i="0">
+              <a:tr h="536230">
+                <a:tc>
+                  <a:txBody>
+                    <a:bodyPr wrap="square"/>
+                    <a:lstStyle/>
+                    <a:p>
+                      <a:r>
+                        <a:rPr sz="1500" b="1" i="0">
                           <a:solidFill>
                             <a:srgbClr val="FFFFFF"/>
                           </a:solidFill>
@@ -17307,7 +17310,7 @@
                     <a:lstStyle/>
                     <a:p>
                       <a:r>
-                        <a:rPr sz="1250" b="1" i="0">
+                        <a:rPr sz="1500" b="1" i="0">
                           <a:solidFill>
                             <a:srgbClr val="FFFFFF"/>
                           </a:solidFill>
@@ -17330,7 +17333,7 @@
                     <a:lstStyle/>
                     <a:p>
                       <a:r>
-                        <a:rPr sz="1250" b="1" i="0">
+                        <a:rPr sz="1500" b="1" i="0">
                           <a:solidFill>
                             <a:srgbClr val="FFFFFF"/>
                           </a:solidFill>
@@ -17348,14 +17351,14 @@
                   </a:tcPr>
                 </a:tc>
               </a:tr>
-              <a:tr h="406418">
-                <a:tc>
-                  <a:txBody>
-                    <a:bodyPr wrap="square"/>
-                    <a:lstStyle/>
-                    <a:p>
-                      <a:r>
-                        <a:rPr sz="1250" b="1" i="0">
+              <a:tr h="536230">
+                <a:tc>
+                  <a:txBody>
+                    <a:bodyPr wrap="square"/>
+                    <a:lstStyle/>
+                    <a:p>
+                      <a:r>
+                        <a:rPr sz="1500" b="1" i="0">
                           <a:solidFill>
                             <a:srgbClr val="222222"/>
                           </a:solidFill>
@@ -17378,7 +17381,7 @@
                     <a:lstStyle/>
                     <a:p>
                       <a:r>
-                        <a:rPr sz="1250" b="0" i="0">
+                        <a:rPr sz="1500" b="0" i="0">
                           <a:solidFill>
                             <a:srgbClr val="222222"/>
                           </a:solidFill>
@@ -17401,7 +17404,7 @@
                     <a:lstStyle/>
                     <a:p>
                       <a:r>
-                        <a:rPr sz="1250" b="0" i="0">
+                        <a:rPr sz="1500" b="0" i="0">
                           <a:solidFill>
                             <a:srgbClr val="222222"/>
                           </a:solidFill>
@@ -17419,14 +17422,14 @@
                   </a:tcPr>
                 </a:tc>
               </a:tr>
-              <a:tr h="406418">
-                <a:tc>
-                  <a:txBody>
-                    <a:bodyPr wrap="square"/>
-                    <a:lstStyle/>
-                    <a:p>
-                      <a:r>
-                        <a:rPr sz="1250" b="1" i="0">
+              <a:tr h="536230">
+                <a:tc>
+                  <a:txBody>
+                    <a:bodyPr wrap="square"/>
+                    <a:lstStyle/>
+                    <a:p>
+                      <a:r>
+                        <a:rPr sz="1500" b="1" i="0">
                           <a:solidFill>
                             <a:srgbClr val="222222"/>
                           </a:solidFill>
@@ -17449,7 +17452,7 @@
                     <a:lstStyle/>
                     <a:p>
                       <a:r>
-                        <a:rPr sz="1250" b="0" i="0">
+                        <a:rPr sz="1500" b="0" i="0">
                           <a:solidFill>
                             <a:srgbClr val="222222"/>
                           </a:solidFill>
@@ -17472,7 +17475,7 @@
                     <a:lstStyle/>
                     <a:p>
                       <a:r>
-                        <a:rPr sz="1250" b="0" i="0">
+                        <a:rPr sz="1500" b="0" i="0">
                           <a:solidFill>
                             <a:srgbClr val="222222"/>
                           </a:solidFill>
@@ -17490,14 +17493,14 @@
                   </a:tcPr>
                 </a:tc>
               </a:tr>
-              <a:tr h="406418">
-                <a:tc>
-                  <a:txBody>
-                    <a:bodyPr wrap="square"/>
-                    <a:lstStyle/>
-                    <a:p>
-                      <a:r>
-                        <a:rPr sz="1250" b="1" i="0">
+              <a:tr h="536230">
+                <a:tc>
+                  <a:txBody>
+                    <a:bodyPr wrap="square"/>
+                    <a:lstStyle/>
+                    <a:p>
+                      <a:r>
+                        <a:rPr sz="1500" b="1" i="0">
                           <a:solidFill>
                             <a:srgbClr val="222222"/>
                           </a:solidFill>
@@ -17520,7 +17523,7 @@
                     <a:lstStyle/>
                     <a:p>
                       <a:r>
-                        <a:rPr sz="1250" b="0" i="0">
+                        <a:rPr sz="1500" b="0" i="0">
                           <a:solidFill>
                             <a:srgbClr val="222222"/>
                           </a:solidFill>
@@ -17543,7 +17546,7 @@
                     <a:lstStyle/>
                     <a:p>
                       <a:r>
-                        <a:rPr sz="1250" b="0" i="0">
+                        <a:rPr sz="1500" b="0" i="0">
                           <a:solidFill>
                             <a:srgbClr val="222222"/>
                           </a:solidFill>
@@ -17561,14 +17564,14 @@
                   </a:tcPr>
                 </a:tc>
               </a:tr>
-              <a:tr h="406418">
-                <a:tc>
-                  <a:txBody>
-                    <a:bodyPr wrap="square"/>
-                    <a:lstStyle/>
-                    <a:p>
-                      <a:r>
-                        <a:rPr sz="1250" b="1" i="0">
+              <a:tr h="536230">
+                <a:tc>
+                  <a:txBody>
+                    <a:bodyPr wrap="square"/>
+                    <a:lstStyle/>
+                    <a:p>
+                      <a:r>
+                        <a:rPr sz="1500" b="1" i="0">
                           <a:solidFill>
                             <a:srgbClr val="222222"/>
                           </a:solidFill>
@@ -17591,7 +17594,7 @@
                     <a:lstStyle/>
                     <a:p>
                       <a:r>
-                        <a:rPr sz="1250" b="0" i="0">
+                        <a:rPr sz="1500" b="0" i="0">
                           <a:solidFill>
                             <a:srgbClr val="222222"/>
                           </a:solidFill>
@@ -17614,7 +17617,7 @@
                     <a:lstStyle/>
                     <a:p>
                       <a:r>
-                        <a:rPr sz="1250" b="0" i="0">
+                        <a:rPr sz="1500" b="0" i="0">
                           <a:solidFill>
                             <a:srgbClr val="222222"/>
                           </a:solidFill>
@@ -17632,14 +17635,14 @@
                   </a:tcPr>
                 </a:tc>
               </a:tr>
-              <a:tr h="406418">
-                <a:tc>
-                  <a:txBody>
-                    <a:bodyPr wrap="square"/>
-                    <a:lstStyle/>
-                    <a:p>
-                      <a:r>
-                        <a:rPr sz="1250" b="1" i="0">
+              <a:tr h="536230">
+                <a:tc>
+                  <a:txBody>
+                    <a:bodyPr wrap="square"/>
+                    <a:lstStyle/>
+                    <a:p>
+                      <a:r>
+                        <a:rPr sz="1500" b="1" i="0">
                           <a:solidFill>
                             <a:srgbClr val="222222"/>
                           </a:solidFill>
@@ -17662,7 +17665,7 @@
                     <a:lstStyle/>
                     <a:p>
                       <a:r>
-                        <a:rPr sz="1250" b="0" i="0">
+                        <a:rPr sz="1500" b="0" i="0">
                           <a:solidFill>
                             <a:srgbClr val="222222"/>
                           </a:solidFill>
@@ -17685,7 +17688,7 @@
                     <a:lstStyle/>
                     <a:p>
                       <a:r>
-                        <a:rPr sz="1250" b="0" i="0">
+                        <a:rPr sz="1500" b="0" i="0">
                           <a:solidFill>
                             <a:srgbClr val="222222"/>
                           </a:solidFill>
@@ -17703,14 +17706,14 @@
                   </a:tcPr>
                 </a:tc>
               </a:tr>
-              <a:tr h="406418">
-                <a:tc>
-                  <a:txBody>
-                    <a:bodyPr wrap="square"/>
-                    <a:lstStyle/>
-                    <a:p>
-                      <a:r>
-                        <a:rPr sz="1250" b="1" i="0">
+              <a:tr h="536231">
+                <a:tc>
+                  <a:txBody>
+                    <a:bodyPr wrap="square"/>
+                    <a:lstStyle/>
+                    <a:p>
+                      <a:r>
+                        <a:rPr sz="1500" b="1" i="0">
                           <a:solidFill>
                             <a:srgbClr val="222222"/>
                           </a:solidFill>
@@ -17733,7 +17736,7 @@
                     <a:lstStyle/>
                     <a:p>
                       <a:r>
-                        <a:rPr sz="1250" b="0" i="0">
+                        <a:rPr sz="1500" b="0" i="0">
                           <a:solidFill>
                             <a:srgbClr val="222222"/>
                           </a:solidFill>
@@ -17756,7 +17759,7 @@
                     <a:lstStyle/>
                     <a:p>
                       <a:r>
-                        <a:rPr sz="1250" b="0" i="0">
+                        <a:rPr sz="1500" b="0" i="0">
                           <a:solidFill>
                             <a:srgbClr val="222222"/>
                           </a:solidFill>
@@ -17786,8 +17789,8 @@
         </p:nvSpPr>
         <p:spPr>
           <a:xfrm>
-            <a:off x="457200" y="3987927"/>
-            <a:ext cx="11277295" cy="694944"/>
+            <a:off x="457200" y="4896612"/>
+            <a:ext cx="11277295" cy="832104"/>
           </a:xfrm>
           <a:prstGeom prst="rect">
             <a:avLst/>
@@ -17806,7 +17809,7 @@
               </a:spcAft>
             </a:pPr>
             <a:r>
-              <a:rPr sz="1600" b="0" i="0">
+              <a:rPr sz="2000" b="0" i="0">
                 <a:solidFill>
                   <a:srgbClr val="222222"/>
                 </a:solidFill>
@@ -18180,7 +18183,7 @@
         <p:spPr>
           <a:xfrm>
             <a:off x="457200" y="1143000"/>
-            <a:ext cx="11277295" cy="2505456"/>
+            <a:ext cx="11277295" cy="3739896"/>
           </a:xfrm>
           <a:prstGeom prst="rect">
             <a:avLst/>
@@ -18199,7 +18202,7 @@
               </a:spcAft>
             </a:pPr>
             <a:r>
-              <a:rPr sz="1600" b="0" i="0">
+              <a:rPr sz="2000" b="0" i="0">
                 <a:solidFill>
                   <a:srgbClr val="222222"/>
                 </a:solidFill>
@@ -18216,7 +18219,7 @@
               </a:spcAft>
             </a:pPr>
             <a:r>
-              <a:rPr sz="1600" b="0" i="0">
+              <a:rPr sz="2000" b="0" i="0">
                 <a:solidFill>
                   <a:srgbClr val="222222"/>
                 </a:solidFill>
@@ -18233,7 +18236,7 @@
               </a:spcAft>
             </a:pPr>
             <a:r>
-              <a:rPr sz="1600" b="0" i="0">
+              <a:rPr sz="2000" b="0" i="0">
                 <a:solidFill>
                   <a:srgbClr val="222222"/>
                 </a:solidFill>
@@ -18250,7 +18253,7 @@
               </a:spcAft>
             </a:pPr>
             <a:r>
-              <a:rPr sz="1600" b="0" i="0">
+              <a:rPr sz="2000" b="0" i="0">
                 <a:solidFill>
                   <a:srgbClr val="222222"/>
                 </a:solidFill>
@@ -18483,7 +18486,7 @@
         <p:spPr>
           <a:xfrm>
             <a:off x="457200" y="1143000"/>
-            <a:ext cx="11277295" cy="3108960"/>
+            <a:ext cx="11277295" cy="4480559"/>
           </a:xfrm>
           <a:prstGeom prst="rect">
             <a:avLst/>
@@ -18502,7 +18505,7 @@
               </a:spcAft>
             </a:pPr>
             <a:r>
-              <a:rPr sz="1600" b="0" i="0">
+              <a:rPr sz="2000" b="0" i="0">
                 <a:solidFill>
                   <a:srgbClr val="222222"/>
                 </a:solidFill>
@@ -18519,7 +18522,7 @@
               </a:spcAft>
             </a:pPr>
             <a:r>
-              <a:rPr sz="1600" b="0" i="0">
+              <a:rPr sz="2000" b="0" i="0">
                 <a:solidFill>
                   <a:srgbClr val="222222"/>
                 </a:solidFill>
@@ -18536,7 +18539,7 @@
               </a:spcAft>
             </a:pPr>
             <a:r>
-              <a:rPr sz="1600" b="0" i="0">
+              <a:rPr sz="2000" b="0" i="0">
                 <a:solidFill>
                   <a:srgbClr val="222222"/>
                 </a:solidFill>
@@ -18553,7 +18556,7 @@
               </a:spcAft>
             </a:pPr>
             <a:r>
-              <a:rPr sz="1600" b="0" i="0">
+              <a:rPr sz="2000" b="0" i="0">
                 <a:solidFill>
                   <a:srgbClr val="222222"/>
                 </a:solidFill>
@@ -18570,7 +18573,7 @@
               </a:spcAft>
             </a:pPr>
             <a:r>
-              <a:rPr sz="1600" b="0" i="0">
+              <a:rPr sz="2000" b="0" i="0">
                 <a:solidFill>
                   <a:srgbClr val="222222"/>
                 </a:solidFill>
@@ -18803,7 +18806,7 @@
         <p:spPr>
           <a:xfrm>
             <a:off x="457200" y="1143000"/>
-            <a:ext cx="11277295" cy="5128260"/>
+            <a:ext cx="11277295" cy="5128259"/>
           </a:xfrm>
           <a:prstGeom prst="roundRect">
             <a:avLst>
@@ -18836,9 +18839,9 @@
           <a:bodyPr rtlCol="0" anchor="t" wrap="square" lIns="228600" rIns="137160" tIns="91440" bIns="91440"/>
           <a:lstStyle/>
           <a:p>
-            <a:pPr algn="ctr"/>
-            <a:r>
-              <a:rPr sz="1300" b="0" i="0">
+            <a:pPr algn="l"/>
+            <a:r>
+              <a:rPr sz="1299" b="0" i="0">
                 <a:solidFill>
                   <a:srgbClr val="1F2937"/>
                 </a:solidFill>
@@ -18849,8 +18852,9 @@
             </a:r>
           </a:p>
           <a:p>
-            <a:r>
-              <a:rPr sz="1300" b="0" i="0">
+            <a:pPr algn="l"/>
+            <a:r>
+              <a:rPr sz="1299" b="0" i="0">
                 <a:solidFill>
                   <a:srgbClr val="1F2937"/>
                 </a:solidFill>
@@ -18861,8 +18865,9 @@
             </a:r>
           </a:p>
           <a:p>
-            <a:r>
-              <a:rPr sz="1300" b="0" i="0">
+            <a:pPr algn="l"/>
+            <a:r>
+              <a:rPr sz="1299" b="0" i="0">
                 <a:solidFill>
                   <a:srgbClr val="1F2937"/>
                 </a:solidFill>
@@ -18873,8 +18878,9 @@
             </a:r>
           </a:p>
           <a:p>
-            <a:r>
-              <a:rPr sz="1300" b="0" i="0">
+            <a:pPr algn="l"/>
+            <a:r>
+              <a:rPr sz="1299" b="0" i="0">
                 <a:solidFill>
                   <a:srgbClr val="1F2937"/>
                 </a:solidFill>
@@ -18885,8 +18891,9 @@
             </a:r>
           </a:p>
           <a:p>
-            <a:r>
-              <a:rPr sz="1300" b="0" i="0">
+            <a:pPr algn="l"/>
+            <a:r>
+              <a:rPr sz="1299" b="0" i="0">
                 <a:solidFill>
                   <a:srgbClr val="1F2937"/>
                 </a:solidFill>
@@ -18897,8 +18904,9 @@
             </a:r>
           </a:p>
           <a:p>
-            <a:r>
-              <a:rPr sz="1300" b="0" i="0">
+            <a:pPr algn="l"/>
+            <a:r>
+              <a:rPr sz="1299" b="0" i="0">
                 <a:solidFill>
                   <a:srgbClr val="1F2937"/>
                 </a:solidFill>
@@ -18909,8 +18917,9 @@
             </a:r>
           </a:p>
           <a:p>
-            <a:r>
-              <a:rPr sz="1300" b="0" i="0">
+            <a:pPr algn="l"/>
+            <a:r>
+              <a:rPr sz="1299" b="0" i="0">
                 <a:solidFill>
                   <a:srgbClr val="1F2937"/>
                 </a:solidFill>
@@ -18921,8 +18930,9 @@
             </a:r>
           </a:p>
           <a:p>
-            <a:r>
-              <a:rPr sz="1300" b="0" i="0">
+            <a:pPr algn="l"/>
+            <a:r>
+              <a:rPr sz="1299" b="0" i="0">
                 <a:solidFill>
                   <a:srgbClr val="1F2937"/>
                 </a:solidFill>
@@ -18933,8 +18943,9 @@
             </a:r>
           </a:p>
           <a:p>
-            <a:r>
-              <a:rPr sz="1300" b="0" i="0">
+            <a:pPr algn="l"/>
+            <a:r>
+              <a:rPr sz="1299" b="0" i="0">
                 <a:solidFill>
                   <a:srgbClr val="1F2937"/>
                 </a:solidFill>
@@ -18945,8 +18956,9 @@
             </a:r>
           </a:p>
           <a:p>
-            <a:r>
-              <a:rPr sz="1300" b="0" i="0">
+            <a:pPr algn="l"/>
+            <a:r>
+              <a:rPr sz="1299" b="0" i="0">
                 <a:solidFill>
                   <a:srgbClr val="1F2937"/>
                 </a:solidFill>
@@ -18957,8 +18969,9 @@
             </a:r>
           </a:p>
           <a:p>
-            <a:r>
-              <a:rPr sz="1300" b="0" i="0">
+            <a:pPr algn="l"/>
+            <a:r>
+              <a:rPr sz="1299" b="0" i="0">
                 <a:solidFill>
                   <a:srgbClr val="1F2937"/>
                 </a:solidFill>
@@ -18969,8 +18982,9 @@
             </a:r>
           </a:p>
           <a:p>
-            <a:r>
-              <a:rPr sz="1300" b="0" i="0">
+            <a:pPr algn="l"/>
+            <a:r>
+              <a:rPr sz="1299" b="0" i="0">
                 <a:solidFill>
                   <a:srgbClr val="1F2937"/>
                 </a:solidFill>
@@ -18981,8 +18995,9 @@
             </a:r>
           </a:p>
           <a:p>
-            <a:r>
-              <a:rPr sz="1300" b="0" i="0">
+            <a:pPr algn="l"/>
+            <a:r>
+              <a:rPr sz="1299" b="0" i="0">
                 <a:solidFill>
                   <a:srgbClr val="1F2937"/>
                 </a:solidFill>
@@ -18993,8 +19008,9 @@
             </a:r>
           </a:p>
           <a:p>
-            <a:r>
-              <a:rPr sz="1300" b="0" i="0">
+            <a:pPr algn="l"/>
+            <a:r>
+              <a:rPr sz="1299" b="0" i="0">
                 <a:solidFill>
                   <a:srgbClr val="1F2937"/>
                 </a:solidFill>
@@ -19005,8 +19021,9 @@
             </a:r>
           </a:p>
           <a:p>
-            <a:r>
-              <a:rPr sz="1300" b="0" i="0">
+            <a:pPr algn="l"/>
+            <a:r>
+              <a:rPr sz="1299" b="0" i="0">
                 <a:solidFill>
                   <a:srgbClr val="1F2937"/>
                 </a:solidFill>
@@ -19017,8 +19034,9 @@
             </a:r>
           </a:p>
           <a:p>
-            <a:r>
-              <a:rPr sz="1300" b="0" i="0">
+            <a:pPr algn="l"/>
+            <a:r>
+              <a:rPr sz="1299" b="0" i="0">
                 <a:solidFill>
                   <a:srgbClr val="1F2937"/>
                 </a:solidFill>
@@ -19029,8 +19047,9 @@
             </a:r>
           </a:p>
           <a:p>
-            <a:r>
-              <a:rPr sz="1300" b="0" i="0">
+            <a:pPr algn="l"/>
+            <a:r>
+              <a:rPr sz="1299" b="0" i="0">
                 <a:solidFill>
                   <a:srgbClr val="1F2937"/>
                 </a:solidFill>
@@ -19041,8 +19060,9 @@
             </a:r>
           </a:p>
           <a:p>
-            <a:r>
-              <a:rPr sz="1300" b="0" i="0">
+            <a:pPr algn="l"/>
+            <a:r>
+              <a:rPr sz="1299" b="0" i="0">
                 <a:solidFill>
                   <a:srgbClr val="1F2937"/>
                 </a:solidFill>
@@ -19053,8 +19073,9 @@
             </a:r>
           </a:p>
           <a:p>
-            <a:r>
-              <a:rPr sz="1300" b="0" i="0">
+            <a:pPr algn="l"/>
+            <a:r>
+              <a:rPr sz="1299" b="0" i="0">
                 <a:solidFill>
                   <a:srgbClr val="1F2937"/>
                 </a:solidFill>
@@ -19065,8 +19086,9 @@
             </a:r>
           </a:p>
           <a:p>
-            <a:r>
-              <a:rPr sz="1300" b="0" i="0">
+            <a:pPr algn="l"/>
+            <a:r>
+              <a:rPr sz="1299" b="0" i="0">
                 <a:solidFill>
                   <a:srgbClr val="1F2937"/>
                 </a:solidFill>
@@ -19077,8 +19099,9 @@
             </a:r>
           </a:p>
           <a:p>
-            <a:r>
-              <a:rPr sz="1300" b="0" i="0">
+            <a:pPr algn="l"/>
+            <a:r>
+              <a:rPr sz="1299" b="0" i="0">
                 <a:solidFill>
                   <a:srgbClr val="1F2937"/>
                 </a:solidFill>
@@ -19099,7 +19122,7 @@
         <p:spPr>
           <a:xfrm>
             <a:off x="457200" y="1143000"/>
-            <a:ext cx="73152" cy="5128260"/>
+            <a:ext cx="73152" cy="5128259"/>
           </a:xfrm>
           <a:prstGeom prst="rect">
             <a:avLst/>
@@ -19355,7 +19378,7 @@
         <p:spPr>
           <a:xfrm>
             <a:off x="457200" y="1143000"/>
-            <a:ext cx="11277295" cy="967740"/>
+            <a:ext cx="11277295" cy="1101090"/>
           </a:xfrm>
           <a:prstGeom prst="roundRect">
             <a:avLst>
@@ -19388,9 +19411,9 @@
           <a:bodyPr rtlCol="0" anchor="t" wrap="square" lIns="228600" rIns="137160" tIns="91440" bIns="91440"/>
           <a:lstStyle/>
           <a:p>
-            <a:pPr algn="ctr"/>
-            <a:r>
-              <a:rPr sz="1300" b="0" i="0">
+            <a:pPr algn="l"/>
+            <a:r>
+              <a:rPr sz="1550" b="0" i="0">
                 <a:solidFill>
                   <a:srgbClr val="1F2937"/>
                 </a:solidFill>
@@ -19411,7 +19434,7 @@
         <p:spPr>
           <a:xfrm>
             <a:off x="457200" y="1143000"/>
-            <a:ext cx="73152" cy="967740"/>
+            <a:ext cx="73152" cy="1101090"/>
           </a:xfrm>
           <a:prstGeom prst="rect">
             <a:avLst/>
@@ -19454,8 +19477,8 @@
         </p:nvSpPr>
         <p:spPr>
           <a:xfrm>
-            <a:off x="457200" y="2202180"/>
-            <a:ext cx="11277295" cy="967740"/>
+            <a:off x="457200" y="2335530"/>
+            <a:ext cx="11277295" cy="1101090"/>
           </a:xfrm>
           <a:prstGeom prst="roundRect">
             <a:avLst>
@@ -19488,9 +19511,9 @@
           <a:bodyPr rtlCol="0" anchor="t" wrap="square" lIns="228600" rIns="137160" tIns="91440" bIns="91440"/>
           <a:lstStyle/>
           <a:p>
-            <a:pPr algn="ctr"/>
-            <a:r>
-              <a:rPr sz="1300" b="0" i="0">
+            <a:pPr algn="l"/>
+            <a:r>
+              <a:rPr sz="1550" b="0" i="0">
                 <a:solidFill>
                   <a:srgbClr val="1F2937"/>
                 </a:solidFill>
@@ -19510,8 +19533,8 @@
         </p:nvSpPr>
         <p:spPr>
           <a:xfrm>
-            <a:off x="457200" y="2202180"/>
-            <a:ext cx="73152" cy="967740"/>
+            <a:off x="457200" y="2335530"/>
+            <a:ext cx="73152" cy="1101090"/>
           </a:xfrm>
           <a:prstGeom prst="rect">
             <a:avLst/>
@@ -19554,8 +19577,8 @@
         </p:nvSpPr>
         <p:spPr>
           <a:xfrm>
-            <a:off x="457200" y="3261360"/>
-            <a:ext cx="11277295" cy="967740"/>
+            <a:off x="457200" y="3528060"/>
+            <a:ext cx="11277295" cy="1101090"/>
           </a:xfrm>
           <a:prstGeom prst="roundRect">
             <a:avLst>
@@ -19588,9 +19611,9 @@
           <a:bodyPr rtlCol="0" anchor="t" wrap="square" lIns="228600" rIns="137160" tIns="91440" bIns="91440"/>
           <a:lstStyle/>
           <a:p>
-            <a:pPr algn="ctr"/>
-            <a:r>
-              <a:rPr sz="1300" b="0" i="0">
+            <a:pPr algn="l"/>
+            <a:r>
+              <a:rPr sz="1550" b="0" i="0">
                 <a:solidFill>
                   <a:srgbClr val="1F2937"/>
                 </a:solidFill>
@@ -19610,8 +19633,8 @@
         </p:nvSpPr>
         <p:spPr>
           <a:xfrm>
-            <a:off x="457200" y="3261360"/>
-            <a:ext cx="73152" cy="967740"/>
+            <a:off x="457200" y="3528060"/>
+            <a:ext cx="73152" cy="1101090"/>
           </a:xfrm>
           <a:prstGeom prst="rect">
             <a:avLst/>
@@ -19654,8 +19677,8 @@
         </p:nvSpPr>
         <p:spPr>
           <a:xfrm>
-            <a:off x="457200" y="4320540"/>
-            <a:ext cx="11277295" cy="736600"/>
+            <a:off x="457200" y="4720590"/>
+            <a:ext cx="11277295" cy="825500"/>
           </a:xfrm>
           <a:prstGeom prst="roundRect">
             <a:avLst>
@@ -19688,9 +19711,9 @@
           <a:bodyPr rtlCol="0" anchor="t" wrap="square" lIns="228600" rIns="137160" tIns="91440" bIns="91440"/>
           <a:lstStyle/>
           <a:p>
-            <a:pPr algn="ctr"/>
-            <a:r>
-              <a:rPr sz="1300" b="0" i="0">
+            <a:pPr algn="l"/>
+            <a:r>
+              <a:rPr sz="1550" b="0" i="0">
                 <a:solidFill>
                   <a:srgbClr val="1F2937"/>
                 </a:solidFill>
@@ -19710,8 +19733,8 @@
         </p:nvSpPr>
         <p:spPr>
           <a:xfrm>
-            <a:off x="457200" y="4320540"/>
-            <a:ext cx="73152" cy="736600"/>
+            <a:off x="457200" y="4720590"/>
+            <a:ext cx="73152" cy="825500"/>
           </a:xfrm>
           <a:prstGeom prst="rect">
             <a:avLst/>
@@ -19968,7 +19991,7 @@
         </p:nvGraphicFramePr>
         <p:xfrm>
           <a:off x="457200" y="1143000"/>
-          <a:ext cx="11277294" cy="4054474"/>
+          <a:ext cx="11277294" cy="5143500"/>
         </p:xfrm>
         <a:graphic>
           <a:graphicData uri="http://schemas.openxmlformats.org/drawingml/2006/table">
@@ -19977,17 +20000,17 @@
                 <a:tableStyleId>{5C22544A-7EE6-4342-B048-85BDC9FD1C3A}</a:tableStyleId>
               </a:tblPr>
               <a:tblGrid>
-                <a:gridCol w="1470951"/>
-                <a:gridCol w="9806343"/>
+                <a:gridCol w="1747186"/>
+                <a:gridCol w="9530108"/>
               </a:tblGrid>
-              <a:tr h="405447">
-                <a:tc>
-                  <a:txBody>
-                    <a:bodyPr wrap="square"/>
-                    <a:lstStyle/>
-                    <a:p>
-                      <a:r>
-                        <a:rPr sz="1250" b="1" i="0">
+              <a:tr h="514350">
+                <a:tc>
+                  <a:txBody>
+                    <a:bodyPr wrap="square"/>
+                    <a:lstStyle/>
+                    <a:p>
+                      <a:r>
+                        <a:rPr sz="1500" b="1" i="0">
                           <a:solidFill>
                             <a:srgbClr val="FFFFFF"/>
                           </a:solidFill>
@@ -20010,7 +20033,7 @@
                     <a:lstStyle/>
                     <a:p>
                       <a:r>
-                        <a:rPr sz="1250" b="1" i="0">
+                        <a:rPr sz="1500" b="1" i="0">
                           <a:solidFill>
                             <a:srgbClr val="FFFFFF"/>
                           </a:solidFill>
@@ -20028,14 +20051,14 @@
                   </a:tcPr>
                 </a:tc>
               </a:tr>
-              <a:tr h="405447">
-                <a:tc>
-                  <a:txBody>
-                    <a:bodyPr wrap="square"/>
-                    <a:lstStyle/>
-                    <a:p>
-                      <a:r>
-                        <a:rPr sz="1250" b="0" i="0">
+              <a:tr h="514350">
+                <a:tc>
+                  <a:txBody>
+                    <a:bodyPr wrap="square"/>
+                    <a:lstStyle/>
+                    <a:p>
+                      <a:r>
+                        <a:rPr sz="1500" b="0" i="0">
                           <a:solidFill>
                             <a:srgbClr val="222222"/>
                           </a:solidFill>
@@ -20058,7 +20081,7 @@
                     <a:lstStyle/>
                     <a:p>
                       <a:r>
-                        <a:rPr sz="1250" b="0" i="0">
+                        <a:rPr sz="1500" b="0" i="0">
                           <a:solidFill>
                             <a:srgbClr val="222222"/>
                           </a:solidFill>
@@ -20076,14 +20099,14 @@
                   </a:tcPr>
                 </a:tc>
               </a:tr>
-              <a:tr h="405447">
-                <a:tc>
-                  <a:txBody>
-                    <a:bodyPr wrap="square"/>
-                    <a:lstStyle/>
-                    <a:p>
-                      <a:r>
-                        <a:rPr sz="1250" b="0" i="0">
+              <a:tr h="514350">
+                <a:tc>
+                  <a:txBody>
+                    <a:bodyPr wrap="square"/>
+                    <a:lstStyle/>
+                    <a:p>
+                      <a:r>
+                        <a:rPr sz="1500" b="0" i="0">
                           <a:solidFill>
                             <a:srgbClr val="222222"/>
                           </a:solidFill>
@@ -20106,7 +20129,7 @@
                     <a:lstStyle/>
                     <a:p>
                       <a:r>
-                        <a:rPr sz="1250" b="0" i="0">
+                        <a:rPr sz="1500" b="0" i="0">
                           <a:solidFill>
                             <a:srgbClr val="222222"/>
                           </a:solidFill>
@@ -20124,14 +20147,14 @@
                   </a:tcPr>
                 </a:tc>
               </a:tr>
-              <a:tr h="405447">
-                <a:tc>
-                  <a:txBody>
-                    <a:bodyPr wrap="square"/>
-                    <a:lstStyle/>
-                    <a:p>
-                      <a:r>
-                        <a:rPr sz="1250" b="0" i="0">
+              <a:tr h="514350">
+                <a:tc>
+                  <a:txBody>
+                    <a:bodyPr wrap="square"/>
+                    <a:lstStyle/>
+                    <a:p>
+                      <a:r>
+                        <a:rPr sz="1500" b="0" i="0">
                           <a:solidFill>
                             <a:srgbClr val="222222"/>
                           </a:solidFill>
@@ -20154,7 +20177,7 @@
                     <a:lstStyle/>
                     <a:p>
                       <a:r>
-                        <a:rPr sz="1250" b="0" i="0">
+                        <a:rPr sz="1500" b="0" i="0">
                           <a:solidFill>
                             <a:srgbClr val="222222"/>
                           </a:solidFill>
@@ -20172,14 +20195,14 @@
                   </a:tcPr>
                 </a:tc>
               </a:tr>
-              <a:tr h="405447">
-                <a:tc>
-                  <a:txBody>
-                    <a:bodyPr wrap="square"/>
-                    <a:lstStyle/>
-                    <a:p>
-                      <a:r>
-                        <a:rPr sz="1250" b="0" i="0">
+              <a:tr h="514350">
+                <a:tc>
+                  <a:txBody>
+                    <a:bodyPr wrap="square"/>
+                    <a:lstStyle/>
+                    <a:p>
+                      <a:r>
+                        <a:rPr sz="1500" b="0" i="0">
                           <a:solidFill>
                             <a:srgbClr val="222222"/>
                           </a:solidFill>
@@ -20202,7 +20225,7 @@
                     <a:lstStyle/>
                     <a:p>
                       <a:r>
-                        <a:rPr sz="1250" b="0" i="0">
+                        <a:rPr sz="1500" b="0" i="0">
                           <a:solidFill>
                             <a:srgbClr val="222222"/>
                           </a:solidFill>
@@ -20220,14 +20243,14 @@
                   </a:tcPr>
                 </a:tc>
               </a:tr>
-              <a:tr h="405447">
-                <a:tc>
-                  <a:txBody>
-                    <a:bodyPr wrap="square"/>
-                    <a:lstStyle/>
-                    <a:p>
-                      <a:r>
-                        <a:rPr sz="1250" b="0" i="0">
+              <a:tr h="514350">
+                <a:tc>
+                  <a:txBody>
+                    <a:bodyPr wrap="square"/>
+                    <a:lstStyle/>
+                    <a:p>
+                      <a:r>
+                        <a:rPr sz="1500" b="0" i="0">
                           <a:solidFill>
                             <a:srgbClr val="222222"/>
                           </a:solidFill>
@@ -20250,7 +20273,7 @@
                     <a:lstStyle/>
                     <a:p>
                       <a:r>
-                        <a:rPr sz="1250" b="0" i="0">
+                        <a:rPr sz="1500" b="0" i="0">
                           <a:solidFill>
                             <a:srgbClr val="222222"/>
                           </a:solidFill>
@@ -20268,14 +20291,14 @@
                   </a:tcPr>
                 </a:tc>
               </a:tr>
-              <a:tr h="405447">
-                <a:tc>
-                  <a:txBody>
-                    <a:bodyPr wrap="square"/>
-                    <a:lstStyle/>
-                    <a:p>
-                      <a:r>
-                        <a:rPr sz="1250" b="0" i="0">
+              <a:tr h="514350">
+                <a:tc>
+                  <a:txBody>
+                    <a:bodyPr wrap="square"/>
+                    <a:lstStyle/>
+                    <a:p>
+                      <a:r>
+                        <a:rPr sz="1500" b="0" i="0">
                           <a:solidFill>
                             <a:srgbClr val="222222"/>
                           </a:solidFill>
@@ -20298,7 +20321,7 @@
                     <a:lstStyle/>
                     <a:p>
                       <a:r>
-                        <a:rPr sz="1250" b="0" i="0">
+                        <a:rPr sz="1500" b="0" i="0">
                           <a:solidFill>
                             <a:srgbClr val="222222"/>
                           </a:solidFill>
@@ -20316,14 +20339,14 @@
                   </a:tcPr>
                 </a:tc>
               </a:tr>
-              <a:tr h="405447">
-                <a:tc>
-                  <a:txBody>
-                    <a:bodyPr wrap="square"/>
-                    <a:lstStyle/>
-                    <a:p>
-                      <a:r>
-                        <a:rPr sz="1250" b="0" i="0">
+              <a:tr h="514350">
+                <a:tc>
+                  <a:txBody>
+                    <a:bodyPr wrap="square"/>
+                    <a:lstStyle/>
+                    <a:p>
+                      <a:r>
+                        <a:rPr sz="1500" b="0" i="0">
                           <a:solidFill>
                             <a:srgbClr val="222222"/>
                           </a:solidFill>
@@ -20346,7 +20369,7 @@
                     <a:lstStyle/>
                     <a:p>
                       <a:r>
-                        <a:rPr sz="1250" b="0" i="0">
+                        <a:rPr sz="1500" b="0" i="0">
                           <a:solidFill>
                             <a:srgbClr val="222222"/>
                           </a:solidFill>
@@ -20364,14 +20387,14 @@
                   </a:tcPr>
                 </a:tc>
               </a:tr>
-              <a:tr h="405447">
-                <a:tc>
-                  <a:txBody>
-                    <a:bodyPr wrap="square"/>
-                    <a:lstStyle/>
-                    <a:p>
-                      <a:r>
-                        <a:rPr sz="1250" b="0" i="0">
+              <a:tr h="514350">
+                <a:tc>
+                  <a:txBody>
+                    <a:bodyPr wrap="square"/>
+                    <a:lstStyle/>
+                    <a:p>
+                      <a:r>
+                        <a:rPr sz="1500" b="0" i="0">
                           <a:solidFill>
                             <a:srgbClr val="222222"/>
                           </a:solidFill>
@@ -20394,7 +20417,7 @@
                     <a:lstStyle/>
                     <a:p>
                       <a:r>
-                        <a:rPr sz="1250" b="0" i="0">
+                        <a:rPr sz="1500" b="0" i="0">
                           <a:solidFill>
                             <a:srgbClr val="222222"/>
                           </a:solidFill>
@@ -20412,14 +20435,14 @@
                   </a:tcPr>
                 </a:tc>
               </a:tr>
-              <a:tr h="405451">
-                <a:tc>
-                  <a:txBody>
-                    <a:bodyPr wrap="square"/>
-                    <a:lstStyle/>
-                    <a:p>
-                      <a:r>
-                        <a:rPr sz="1250" b="0" i="0">
+              <a:tr h="514350">
+                <a:tc>
+                  <a:txBody>
+                    <a:bodyPr wrap="square"/>
+                    <a:lstStyle/>
+                    <a:p>
+                      <a:r>
+                        <a:rPr sz="1500" b="0" i="0">
                           <a:solidFill>
                             <a:srgbClr val="222222"/>
                           </a:solidFill>
@@ -20442,7 +20465,7 @@
                     <a:lstStyle/>
                     <a:p>
                       <a:r>
-                        <a:rPr sz="1250" b="0" i="0">
+                        <a:rPr sz="1500" b="0" i="0">
                           <a:solidFill>
                             <a:srgbClr val="222222"/>
                           </a:solidFill>
@@ -20685,7 +20708,7 @@
         <p:spPr>
           <a:xfrm>
             <a:off x="457200" y="1143000"/>
-            <a:ext cx="11277295" cy="2670048"/>
+            <a:ext cx="11277295" cy="3561588"/>
           </a:xfrm>
           <a:prstGeom prst="rect">
             <a:avLst/>
@@ -20704,7 +20727,7 @@
               </a:spcAft>
             </a:pPr>
             <a:r>
-              <a:rPr sz="1600" b="0" i="0">
+              <a:rPr sz="2000" b="0" i="0">
                 <a:solidFill>
                   <a:srgbClr val="222222"/>
                 </a:solidFill>
@@ -20721,7 +20744,7 @@
               </a:spcAft>
             </a:pPr>
             <a:r>
-              <a:rPr sz="1500" b="0" i="0">
+              <a:rPr sz="1900" b="0" i="0">
                 <a:solidFill>
                   <a:srgbClr val="374151"/>
                 </a:solidFill>
@@ -20738,7 +20761,7 @@
               </a:spcAft>
             </a:pPr>
             <a:r>
-              <a:rPr sz="1500" b="0" i="0">
+              <a:rPr sz="1900" b="0" i="0">
                 <a:solidFill>
                   <a:srgbClr val="374151"/>
                 </a:solidFill>
@@ -20755,7 +20778,7 @@
               </a:spcAft>
             </a:pPr>
             <a:r>
-              <a:rPr sz="1500" b="0" i="0">
+              <a:rPr sz="1900" b="0" i="0">
                 <a:solidFill>
                   <a:srgbClr val="374151"/>
                 </a:solidFill>
@@ -20772,7 +20795,7 @@
               </a:spcAft>
             </a:pPr>
             <a:r>
-              <a:rPr sz="1500" b="0" i="0">
+              <a:rPr sz="1900" b="0" i="0">
                 <a:solidFill>
                   <a:srgbClr val="374151"/>
                 </a:solidFill>
@@ -20789,7 +20812,7 @@
               </a:spcAft>
             </a:pPr>
             <a:r>
-              <a:rPr sz="1500" b="0" i="0">
+              <a:rPr sz="1900" b="0" i="0">
                 <a:solidFill>
                   <a:srgbClr val="374151"/>
                 </a:solidFill>
@@ -20806,7 +20829,7 @@
               </a:spcAft>
             </a:pPr>
             <a:r>
-              <a:rPr sz="1600" b="0" i="0">
+              <a:rPr sz="2000" b="0" i="0">
                 <a:solidFill>
                   <a:srgbClr val="222222"/>
                 </a:solidFill>
@@ -20826,8 +20849,8 @@
         </p:nvSpPr>
         <p:spPr>
           <a:xfrm>
-            <a:off x="457200" y="3813048"/>
-            <a:ext cx="11277295" cy="273050"/>
+            <a:off x="457200" y="4704588"/>
+            <a:ext cx="11277295" cy="297815"/>
           </a:xfrm>
           <a:prstGeom prst="rect">
             <a:avLst/>
@@ -20841,7 +20864,7 @@
           <a:lstStyle/>
           <a:p>
             <a:r>
-              <a:rPr sz="1100" b="0" i="1">
+              <a:rPr sz="1250" b="0" i="1">
                 <a:solidFill>
                   <a:srgbClr val="6B7280"/>
                 </a:solidFill>
@@ -21215,7 +21238,7 @@
         <p:spPr>
           <a:xfrm>
             <a:off x="457200" y="1143000"/>
-            <a:ext cx="11277295" cy="2615184"/>
+            <a:ext cx="11277295" cy="4535424"/>
           </a:xfrm>
           <a:prstGeom prst="rect">
             <a:avLst/>
@@ -21234,7 +21257,7 @@
               </a:spcAft>
             </a:pPr>
             <a:r>
-              <a:rPr sz="1600" b="0" i="0">
+              <a:rPr sz="2000" b="0" i="0">
                 <a:solidFill>
                   <a:srgbClr val="222222"/>
                 </a:solidFill>
@@ -21251,7 +21274,7 @@
               </a:spcAft>
             </a:pPr>
             <a:r>
-              <a:rPr sz="1600" b="0" i="0">
+              <a:rPr sz="2000" b="0" i="0">
                 <a:solidFill>
                   <a:srgbClr val="222222"/>
                 </a:solidFill>
@@ -21268,7 +21291,7 @@
               </a:spcAft>
             </a:pPr>
             <a:r>
-              <a:rPr sz="1500" b="0" i="0">
+              <a:rPr sz="1900" b="0" i="0">
                 <a:solidFill>
                   <a:srgbClr val="374151"/>
                 </a:solidFill>
@@ -21285,7 +21308,7 @@
               </a:spcAft>
             </a:pPr>
             <a:r>
-              <a:rPr sz="1500" b="0" i="0">
+              <a:rPr sz="1900" b="0" i="0">
                 <a:solidFill>
                   <a:srgbClr val="374151"/>
                 </a:solidFill>
@@ -21302,7 +21325,7 @@
               </a:spcAft>
             </a:pPr>
             <a:r>
-              <a:rPr sz="1600" b="0" i="0">
+              <a:rPr sz="2000" b="0" i="0">
                 <a:solidFill>
                   <a:srgbClr val="222222"/>
                 </a:solidFill>
@@ -21319,7 +21342,7 @@
               </a:spcAft>
             </a:pPr>
             <a:r>
-              <a:rPr sz="1600" b="0" i="0">
+              <a:rPr sz="2000" b="0" i="0">
                 <a:solidFill>
                   <a:srgbClr val="222222"/>
                 </a:solidFill>
@@ -21553,7 +21576,7 @@
         </p:nvGraphicFramePr>
         <p:xfrm>
           <a:off x="457200" y="1143000"/>
-          <a:ext cx="11277293" cy="1429004"/>
+          <a:ext cx="11277294" cy="2363724"/>
         </p:xfrm>
         <a:graphic>
           <a:graphicData uri="http://schemas.openxmlformats.org/drawingml/2006/table">
@@ -21562,19 +21585,19 @@
                 <a:tableStyleId>{5C22544A-7EE6-4342-B048-85BDC9FD1C3A}</a:tableStyleId>
               </a:tblPr>
               <a:tblGrid>
-                <a:gridCol w="1720265"/>
-                <a:gridCol w="2484827"/>
-                <a:gridCol w="6307639"/>
-                <a:gridCol w="764562"/>
+                <a:gridCol w="1824268"/>
+                <a:gridCol w="2155953"/>
+                <a:gridCol w="5472805"/>
+                <a:gridCol w="1824268"/>
               </a:tblGrid>
-              <a:tr h="357251">
-                <a:tc>
-                  <a:txBody>
-                    <a:bodyPr wrap="square"/>
-                    <a:lstStyle/>
-                    <a:p>
-                      <a:r>
-                        <a:rPr sz="1250" b="1" i="0">
+              <a:tr h="590931">
+                <a:tc>
+                  <a:txBody>
+                    <a:bodyPr wrap="square"/>
+                    <a:lstStyle/>
+                    <a:p>
+                      <a:r>
+                        <a:rPr sz="1500" b="1" i="0">
                           <a:solidFill>
                             <a:srgbClr val="FFFFFF"/>
                           </a:solidFill>
@@ -21597,7 +21620,7 @@
                     <a:lstStyle/>
                     <a:p>
                       <a:r>
-                        <a:rPr sz="1250" b="1" i="0">
+                        <a:rPr sz="1500" b="1" i="0">
                           <a:solidFill>
                             <a:srgbClr val="FFFFFF"/>
                           </a:solidFill>
@@ -21620,7 +21643,7 @@
                     <a:lstStyle/>
                     <a:p>
                       <a:r>
-                        <a:rPr sz="1250" b="1" i="0">
+                        <a:rPr sz="1500" b="1" i="0">
                           <a:solidFill>
                             <a:srgbClr val="FFFFFF"/>
                           </a:solidFill>
@@ -21643,7 +21666,7 @@
                     <a:lstStyle/>
                     <a:p>
                       <a:r>
-                        <a:rPr sz="1250" b="1" i="0">
+                        <a:rPr sz="1500" b="1" i="0">
                           <a:solidFill>
                             <a:srgbClr val="FFFFFF"/>
                           </a:solidFill>
@@ -21661,14 +21684,14 @@
                   </a:tcPr>
                 </a:tc>
               </a:tr>
-              <a:tr h="357251">
-                <a:tc>
-                  <a:txBody>
-                    <a:bodyPr wrap="square"/>
-                    <a:lstStyle/>
-                    <a:p>
-                      <a:r>
-                        <a:rPr sz="1250" b="1" i="0">
+              <a:tr h="590931">
+                <a:tc>
+                  <a:txBody>
+                    <a:bodyPr wrap="square"/>
+                    <a:lstStyle/>
+                    <a:p>
+                      <a:r>
+                        <a:rPr sz="1500" b="1" i="0">
                           <a:solidFill>
                             <a:srgbClr val="222222"/>
                           </a:solidFill>
@@ -21691,7 +21714,7 @@
                     <a:lstStyle/>
                     <a:p>
                       <a:r>
-                        <a:rPr sz="1250" b="0" i="0">
+                        <a:rPr sz="1500" b="0" i="0">
                           <a:solidFill>
                             <a:srgbClr val="222222"/>
                           </a:solidFill>
@@ -21714,7 +21737,7 @@
                     <a:lstStyle/>
                     <a:p>
                       <a:r>
-                        <a:rPr sz="1250" b="0" i="0">
+                        <a:rPr sz="1500" b="0" i="0">
                           <a:solidFill>
                             <a:srgbClr val="222222"/>
                           </a:solidFill>
@@ -21737,7 +21760,7 @@
                     <a:lstStyle/>
                     <a:p>
                       <a:r>
-                        <a:rPr sz="1250" b="0" i="0">
+                        <a:rPr sz="1500" b="0" i="0">
                           <a:solidFill>
                             <a:srgbClr val="222222"/>
                           </a:solidFill>
@@ -21755,14 +21778,14 @@
                   </a:tcPr>
                 </a:tc>
               </a:tr>
-              <a:tr h="357251">
-                <a:tc>
-                  <a:txBody>
-                    <a:bodyPr wrap="square"/>
-                    <a:lstStyle/>
-                    <a:p>
-                      <a:r>
-                        <a:rPr sz="1250" b="1" i="0">
+              <a:tr h="590931">
+                <a:tc>
+                  <a:txBody>
+                    <a:bodyPr wrap="square"/>
+                    <a:lstStyle/>
+                    <a:p>
+                      <a:r>
+                        <a:rPr sz="1500" b="1" i="0">
                           <a:solidFill>
                             <a:srgbClr val="222222"/>
                           </a:solidFill>
@@ -21785,7 +21808,7 @@
                     <a:lstStyle/>
                     <a:p>
                       <a:r>
-                        <a:rPr sz="1250" b="0" i="0">
+                        <a:rPr sz="1500" b="0" i="0">
                           <a:solidFill>
                             <a:srgbClr val="222222"/>
                           </a:solidFill>
@@ -21808,7 +21831,7 @@
                     <a:lstStyle/>
                     <a:p>
                       <a:r>
-                        <a:rPr sz="1250" b="0" i="0">
+                        <a:rPr sz="1500" b="0" i="0">
                           <a:solidFill>
                             <a:srgbClr val="222222"/>
                           </a:solidFill>
@@ -21831,7 +21854,7 @@
                     <a:lstStyle/>
                     <a:p>
                       <a:r>
-                        <a:rPr sz="1250" b="0" i="0">
+                        <a:rPr sz="1500" b="0" i="0">
                           <a:solidFill>
                             <a:srgbClr val="222222"/>
                           </a:solidFill>
@@ -21849,14 +21872,14 @@
                   </a:tcPr>
                 </a:tc>
               </a:tr>
-              <a:tr h="357251">
-                <a:tc>
-                  <a:txBody>
-                    <a:bodyPr wrap="square"/>
-                    <a:lstStyle/>
-                    <a:p>
-                      <a:r>
-                        <a:rPr sz="1250" b="1" i="0">
+              <a:tr h="590931">
+                <a:tc>
+                  <a:txBody>
+                    <a:bodyPr wrap="square"/>
+                    <a:lstStyle/>
+                    <a:p>
+                      <a:r>
+                        <a:rPr sz="1500" b="1" i="0">
                           <a:solidFill>
                             <a:srgbClr val="222222"/>
                           </a:solidFill>
@@ -21879,7 +21902,7 @@
                     <a:lstStyle/>
                     <a:p>
                       <a:r>
-                        <a:rPr sz="1250" b="0" i="0">
+                        <a:rPr sz="1500" b="0" i="0">
                           <a:solidFill>
                             <a:srgbClr val="222222"/>
                           </a:solidFill>
@@ -21902,7 +21925,7 @@
                     <a:lstStyle/>
                     <a:p>
                       <a:r>
-                        <a:rPr sz="1250" b="0" i="0">
+                        <a:rPr sz="1500" b="0" i="0">
                           <a:solidFill>
                             <a:srgbClr val="222222"/>
                           </a:solidFill>
@@ -21925,7 +21948,7 @@
                     <a:lstStyle/>
                     <a:p>
                       <a:r>
-                        <a:rPr sz="1250" b="0" i="0">
+                        <a:rPr sz="1500" b="0" i="0">
                           <a:solidFill>
                             <a:srgbClr val="222222"/>
                           </a:solidFill>
@@ -21955,8 +21978,8 @@
         </p:nvSpPr>
         <p:spPr>
           <a:xfrm>
-            <a:off x="457200" y="2572004"/>
-            <a:ext cx="11277295" cy="1298448"/>
+            <a:off x="457200" y="3506724"/>
+            <a:ext cx="11277295" cy="1572768"/>
           </a:xfrm>
           <a:prstGeom prst="rect">
             <a:avLst/>
@@ -21975,7 +21998,7 @@
               </a:spcAft>
             </a:pPr>
             <a:r>
-              <a:rPr sz="1600" b="0" i="0">
+              <a:rPr sz="2000" b="0" i="0">
                 <a:solidFill>
                   <a:srgbClr val="222222"/>
                 </a:solidFill>
@@ -21992,7 +22015,7 @@
               </a:spcAft>
             </a:pPr>
             <a:r>
-              <a:rPr sz="1600" b="0" i="0">
+              <a:rPr sz="2000" b="0" i="0">
                 <a:solidFill>
                   <a:srgbClr val="222222"/>
                 </a:solidFill>
